--- a/doc/original_graphs.pptx
+++ b/doc/original_graphs.pptx
@@ -8,13 +8,18 @@
     <p:notesMasterId r:id="rId4"/>
   </p:notesMasterIdLst>
   <p:handoutMasterIdLst>
-    <p:handoutMasterId r:id="rId8"/>
+    <p:handoutMasterId r:id="rId13"/>
   </p:handoutMasterIdLst>
   <p:sldIdLst>
     <p:sldId id="256" r:id="rId3"/>
     <p:sldId id="257" r:id="rId5"/>
     <p:sldId id="258" r:id="rId6"/>
     <p:sldId id="259" r:id="rId7"/>
+    <p:sldId id="260" r:id="rId8"/>
+    <p:sldId id="261" r:id="rId9"/>
+    <p:sldId id="262" r:id="rId10"/>
+    <p:sldId id="263" r:id="rId11"/>
+    <p:sldId id="264" r:id="rId12"/>
   </p:sldIdLst>
   <p:sldSz cx="12192000" cy="6858000"/>
   <p:notesSz cx="7103745" cy="10234295"/>
@@ -116,12 +121,12 @@
   <p:extLst>
     <p:ext uri="{EFAFB233-063F-42B5-8137-9DF3F51BA10A}">
       <p15:sldGuideLst xmlns:p15="http://schemas.microsoft.com/office/powerpoint/2012/main">
-        <p15:guide id="1" orient="horz" pos="2179" userDrawn="1">
+        <p15:guide id="1" orient="horz" pos="2157" userDrawn="1">
           <p15:clr>
             <a:srgbClr val="A4A3A4"/>
           </p15:clr>
         </p15:guide>
-        <p15:guide id="2" pos="3812" userDrawn="1">
+        <p15:guide id="2" pos="3828" userDrawn="1">
           <p15:clr>
             <a:srgbClr val="A4A3A4"/>
           </p15:clr>
@@ -130,6 +135,12 @@
     </p:ext>
   </p:extLst>
 </p:presentation>
+</file>
+
+<file path=ppt/commentAuthors.xml><?xml version="1.0" encoding="utf-8"?>
+<p:cmAuthorLst xmlns:a="http://schemas.openxmlformats.org/drawingml/2006/main" xmlns:r="http://schemas.openxmlformats.org/officeDocument/2006/relationships" xmlns:p="http://schemas.openxmlformats.org/presentationml/2006/main">
+  <p:cmAuthor id="1" name="pc" initials="p" lastIdx="1" clrIdx="0"/>
+</p:cmAuthorLst>
 </file>
 
 <file path=ppt/handoutMasters/handoutMaster1.xml><?xml version="1.0" encoding="utf-8"?>
@@ -638,6 +649,54 @@
 </file>
 
 <file path=ppt/notesSlides/notesSlide1.xml><?xml version="1.0" encoding="utf-8"?>
+<p:notes xmlns:a="http://schemas.openxmlformats.org/drawingml/2006/main" xmlns:r="http://schemas.openxmlformats.org/officeDocument/2006/relationships" xmlns:p="http://schemas.openxmlformats.org/presentationml/2006/main">
+  <p:cSld>
+    <p:spTree>
+      <p:nvGrpSpPr>
+        <p:cNvPr id="1" name=""/>
+        <p:cNvGrpSpPr/>
+        <p:nvPr/>
+      </p:nvGrpSpPr>
+      <p:grpSpPr/>
+      <p:sp>
+        <p:nvSpPr>
+          <p:cNvPr id="2" name="幻灯片图像占位符 1"/>
+          <p:cNvSpPr>
+            <a:spLocks noGrp="1"/>
+          </p:cNvSpPr>
+          <p:nvPr>
+            <p:ph type="sldImg" idx="2"/>
+          </p:nvPr>
+        </p:nvSpPr>
+        <p:spPr/>
+      </p:sp>
+      <p:sp>
+        <p:nvSpPr>
+          <p:cNvPr id="3" name="文本占位符 2"/>
+          <p:cNvSpPr>
+            <a:spLocks noGrp="1"/>
+          </p:cNvSpPr>
+          <p:nvPr>
+            <p:ph type="body" idx="3"/>
+          </p:nvPr>
+        </p:nvSpPr>
+        <p:spPr/>
+        <p:txBody>
+          <a:bodyPr/>
+          <a:p>
+            <a:endParaRPr lang="zh-CN" altLang="en-US"/>
+          </a:p>
+        </p:txBody>
+      </p:sp>
+    </p:spTree>
+  </p:cSld>
+  <p:clrMapOvr>
+    <a:masterClrMapping/>
+  </p:clrMapOvr>
+</p:notes>
+</file>
+
+<file path=ppt/notesSlides/notesSlide2.xml><?xml version="1.0" encoding="utf-8"?>
 <p:notes xmlns:a="http://schemas.openxmlformats.org/drawingml/2006/main" xmlns:r="http://schemas.openxmlformats.org/officeDocument/2006/relationships" xmlns:p="http://schemas.openxmlformats.org/presentationml/2006/main">
   <p:cSld>
     <p:spTree>
@@ -3860,26 +3919,6 @@
           </a:p>
         </p:txBody>
       </p:sp>
-      <p:pic>
-        <p:nvPicPr>
-          <p:cNvPr id="9" name="图片 8"/>
-          <p:cNvPicPr/>
-          <p:nvPr/>
-        </p:nvPicPr>
-        <p:blipFill>
-          <a:blip r:embed="rId2"/>
-          <a:srcRect l="41202" b="727"/>
-        </p:blipFill>
-        <p:spPr>
-          <a:xfrm>
-            <a:off x="5452110" y="12065"/>
-            <a:ext cx="2296160" cy="1388110"/>
-          </a:xfrm>
-          <a:prstGeom prst="rect">
-            <a:avLst/>
-          </a:prstGeom>
-        </p:spPr>
-      </p:pic>
       <p:sp>
         <p:nvSpPr>
           <p:cNvPr id="10" name="椭圆 9"/>
@@ -4034,7 +4073,7 @@
           <p:nvPr/>
         </p:nvPicPr>
         <p:blipFill>
-          <a:blip r:embed="rId3"/>
+          <a:blip r:embed="rId2"/>
           <a:srcRect l="16689" t="15686" r="15756" b="5754"/>
         </p:blipFill>
         <p:spPr>
@@ -5547,8 +5586,8 @@
         </p:nvCxnSpPr>
         <p:spPr>
           <a:xfrm rot="10800000">
-            <a:off x="6600190" y="1400175"/>
-            <a:ext cx="1372870" cy="244475"/>
+            <a:off x="6600190" y="1186815"/>
+            <a:ext cx="1372870" cy="457835"/>
           </a:xfrm>
           <a:prstGeom prst="bentConnector2">
             <a:avLst/>
@@ -6039,9 +6078,9 @@
           <p:nvPr/>
         </p:nvCxnSpPr>
         <p:spPr>
-          <a:xfrm flipV="1">
-            <a:off x="4408805" y="706120"/>
-            <a:ext cx="1043305" cy="6985"/>
+          <a:xfrm>
+            <a:off x="4408805" y="713105"/>
+            <a:ext cx="1043305" cy="10160"/>
           </a:xfrm>
           <a:prstGeom prst="straightConnector1">
             <a:avLst/>
@@ -6329,7 +6368,7 @@
           <p:nvPr/>
         </p:nvPicPr>
         <p:blipFill>
-          <a:blip r:embed="rId4"/>
+          <a:blip r:embed="rId3"/>
           <a:srcRect l="10481" t="23343" r="10176" b="24231"/>
         </p:blipFill>
         <p:spPr>
@@ -6853,6 +6892,76 @@
           </a:fontRef>
         </p:style>
       </p:cxnSp>
+      <p:grpSp>
+        <p:nvGrpSpPr>
+          <p:cNvPr id="24" name="组合 23"/>
+          <p:cNvGrpSpPr/>
+          <p:nvPr/>
+        </p:nvGrpSpPr>
+        <p:grpSpPr>
+          <a:xfrm>
+            <a:off x="5452110" y="6985"/>
+            <a:ext cx="2296160" cy="1179195"/>
+            <a:chOff x="8586" y="347"/>
+            <a:chExt cx="3616" cy="1857"/>
+          </a:xfrm>
+        </p:grpSpPr>
+        <p:pic>
+          <p:nvPicPr>
+            <p:cNvPr id="9" name="图片 8"/>
+            <p:cNvPicPr/>
+            <p:nvPr/>
+          </p:nvPicPr>
+          <p:blipFill>
+            <a:blip r:embed="rId4"/>
+            <a:srcRect l="41202" t="32924" b="727"/>
+          </p:blipFill>
+          <p:spPr>
+            <a:xfrm>
+              <a:off x="8586" y="744"/>
+              <a:ext cx="3616" cy="1461"/>
+            </a:xfrm>
+            <a:prstGeom prst="rect">
+              <a:avLst/>
+            </a:prstGeom>
+          </p:spPr>
+        </p:pic>
+        <p:sp>
+          <p:nvSpPr>
+            <p:cNvPr id="22" name="文本框 21"/>
+            <p:cNvSpPr txBox="1"/>
+            <p:nvPr/>
+          </p:nvSpPr>
+          <p:spPr>
+            <a:xfrm>
+              <a:off x="9951" y="347"/>
+              <a:ext cx="1214" cy="581"/>
+            </a:xfrm>
+            <a:prstGeom prst="rect">
+              <a:avLst/>
+            </a:prstGeom>
+            <a:noFill/>
+          </p:spPr>
+          <p:txBody>
+            <a:bodyPr wrap="square" rtlCol="0">
+              <a:noAutofit/>
+            </a:bodyPr>
+            <a:p>
+              <a:r>
+                <a:rPr lang="en-US" altLang="zh-CN" sz="1400" b="1">
+                  <a:latin typeface="Times New Roman" panose="02020603050405020304" charset="0"/>
+                  <a:cs typeface="Times New Roman" panose="02020603050405020304" charset="0"/>
+                </a:rPr>
+                <a:t>Robot</a:t>
+              </a:r>
+              <a:endParaRPr lang="en-US" altLang="zh-CN" sz="1400" b="1">
+                <a:latin typeface="Times New Roman" panose="02020603050405020304" charset="0"/>
+                <a:cs typeface="Times New Roman" panose="02020603050405020304" charset="0"/>
+              </a:endParaRPr>
+            </a:p>
+          </p:txBody>
+        </p:sp>
+      </p:grpSp>
     </p:spTree>
   </p:cSld>
   <p:clrMapOvr>
@@ -6979,6 +7088,2947 @@
           </a:prstGeom>
         </p:spPr>
       </p:pic>
+    </p:spTree>
+  </p:cSld>
+  <p:clrMapOvr>
+    <a:masterClrMapping/>
+  </p:clrMapOvr>
+</p:sld>
+</file>
+
+<file path=ppt/slides/slide5.xml><?xml version="1.0" encoding="utf-8"?>
+<p:sld xmlns:a="http://schemas.openxmlformats.org/drawingml/2006/main" xmlns:r="http://schemas.openxmlformats.org/officeDocument/2006/relationships" xmlns:p="http://schemas.openxmlformats.org/presentationml/2006/main">
+  <p:cSld>
+    <p:spTree>
+      <p:nvGrpSpPr>
+        <p:cNvPr id="1" name=""/>
+        <p:cNvGrpSpPr/>
+        <p:nvPr/>
+      </p:nvGrpSpPr>
+      <p:grpSpPr/>
+      <p:pic>
+        <p:nvPicPr>
+          <p:cNvPr id="4" name="图片 3"/>
+          <p:cNvPicPr>
+            <a:picLocks noChangeAspect="1"/>
+          </p:cNvPicPr>
+          <p:nvPr/>
+        </p:nvPicPr>
+        <p:blipFill>
+          <a:blip r:embed="rId1"/>
+          <a:stretch>
+            <a:fillRect/>
+          </a:stretch>
+        </p:blipFill>
+        <p:spPr>
+          <a:xfrm>
+            <a:off x="-2893060" y="-766445"/>
+            <a:ext cx="17978755" cy="8391525"/>
+          </a:xfrm>
+          <a:prstGeom prst="rect">
+            <a:avLst/>
+          </a:prstGeom>
+        </p:spPr>
+      </p:pic>
+    </p:spTree>
+  </p:cSld>
+  <p:clrMapOvr>
+    <a:masterClrMapping/>
+  </p:clrMapOvr>
+</p:sld>
+</file>
+
+<file path=ppt/slides/slide6.xml><?xml version="1.0" encoding="utf-8"?>
+<p:sld xmlns:a="http://schemas.openxmlformats.org/drawingml/2006/main" xmlns:r="http://schemas.openxmlformats.org/officeDocument/2006/relationships" xmlns:p="http://schemas.openxmlformats.org/presentationml/2006/main">
+  <p:cSld>
+    <p:spTree>
+      <p:nvGrpSpPr>
+        <p:cNvPr id="1" name=""/>
+        <p:cNvGrpSpPr/>
+        <p:nvPr/>
+      </p:nvGrpSpPr>
+      <p:grpSpPr/>
+      <p:pic>
+        <p:nvPicPr>
+          <p:cNvPr id="4" name="图片 3"/>
+          <p:cNvPicPr>
+            <a:picLocks noChangeAspect="1"/>
+          </p:cNvPicPr>
+          <p:nvPr/>
+        </p:nvPicPr>
+        <p:blipFill>
+          <a:blip r:embed="rId1"/>
+          <a:stretch>
+            <a:fillRect/>
+          </a:stretch>
+        </p:blipFill>
+        <p:spPr>
+          <a:xfrm>
+            <a:off x="-883285" y="-985520"/>
+            <a:ext cx="13959205" cy="8829675"/>
+          </a:xfrm>
+          <a:prstGeom prst="rect">
+            <a:avLst/>
+          </a:prstGeom>
+        </p:spPr>
+      </p:pic>
+    </p:spTree>
+  </p:cSld>
+  <p:clrMapOvr>
+    <a:masterClrMapping/>
+  </p:clrMapOvr>
+</p:sld>
+</file>
+
+<file path=ppt/slides/slide7.xml><?xml version="1.0" encoding="utf-8"?>
+<p:sld xmlns:a="http://schemas.openxmlformats.org/drawingml/2006/main" xmlns:r="http://schemas.openxmlformats.org/officeDocument/2006/relationships" xmlns:p="http://schemas.openxmlformats.org/presentationml/2006/main">
+  <p:cSld>
+    <p:spTree>
+      <p:nvGrpSpPr>
+        <p:cNvPr id="1" name=""/>
+        <p:cNvGrpSpPr/>
+        <p:nvPr/>
+      </p:nvGrpSpPr>
+      <p:grpSpPr/>
+      <p:pic>
+        <p:nvPicPr>
+          <p:cNvPr id="4" name="图片 3"/>
+          <p:cNvPicPr>
+            <a:picLocks noChangeAspect="1"/>
+          </p:cNvPicPr>
+          <p:nvPr/>
+        </p:nvPicPr>
+        <p:blipFill>
+          <a:blip r:embed="rId1"/>
+          <a:stretch>
+            <a:fillRect/>
+          </a:stretch>
+        </p:blipFill>
+        <p:spPr>
+          <a:xfrm>
+            <a:off x="-883285" y="-985520"/>
+            <a:ext cx="13959205" cy="8829675"/>
+          </a:xfrm>
+          <a:prstGeom prst="rect">
+            <a:avLst/>
+          </a:prstGeom>
+        </p:spPr>
+      </p:pic>
+    </p:spTree>
+  </p:cSld>
+  <p:clrMapOvr>
+    <a:masterClrMapping/>
+  </p:clrMapOvr>
+</p:sld>
+</file>
+
+<file path=ppt/slides/slide8.xml><?xml version="1.0" encoding="utf-8"?>
+<p:sld xmlns:a="http://schemas.openxmlformats.org/drawingml/2006/main" xmlns:r="http://schemas.openxmlformats.org/officeDocument/2006/relationships" xmlns:p="http://schemas.openxmlformats.org/presentationml/2006/main">
+  <p:cSld>
+    <p:spTree>
+      <p:nvGrpSpPr>
+        <p:cNvPr id="1" name=""/>
+        <p:cNvGrpSpPr/>
+        <p:nvPr/>
+      </p:nvGrpSpPr>
+      <p:grpSpPr/>
+      <p:pic>
+        <p:nvPicPr>
+          <p:cNvPr id="4" name="图片 3"/>
+          <p:cNvPicPr>
+            <a:picLocks noChangeAspect="1"/>
+          </p:cNvPicPr>
+          <p:nvPr/>
+        </p:nvPicPr>
+        <p:blipFill>
+          <a:blip r:embed="rId1"/>
+          <a:stretch>
+            <a:fillRect/>
+          </a:stretch>
+        </p:blipFill>
+        <p:spPr>
+          <a:xfrm>
+            <a:off x="-883285" y="-985520"/>
+            <a:ext cx="13959205" cy="8829675"/>
+          </a:xfrm>
+          <a:prstGeom prst="rect">
+            <a:avLst/>
+          </a:prstGeom>
+        </p:spPr>
+      </p:pic>
+    </p:spTree>
+  </p:cSld>
+  <p:clrMapOvr>
+    <a:masterClrMapping/>
+  </p:clrMapOvr>
+</p:sld>
+</file>
+
+<file path=ppt/slides/slide9.xml><?xml version="1.0" encoding="utf-8"?>
+<p:sld xmlns:a="http://schemas.openxmlformats.org/drawingml/2006/main" xmlns:r="http://schemas.openxmlformats.org/officeDocument/2006/relationships" xmlns:p="http://schemas.openxmlformats.org/presentationml/2006/main">
+  <p:cSld>
+    <p:spTree>
+      <p:nvGrpSpPr>
+        <p:cNvPr id="1" name=""/>
+        <p:cNvGrpSpPr/>
+        <p:nvPr/>
+      </p:nvGrpSpPr>
+      <p:grpSpPr/>
+      <p:grpSp>
+        <p:nvGrpSpPr>
+          <p:cNvPr id="82" name="组合 81"/>
+          <p:cNvGrpSpPr/>
+          <p:nvPr/>
+        </p:nvGrpSpPr>
+        <p:grpSpPr>
+          <a:xfrm>
+            <a:off x="1093470" y="33020"/>
+            <a:ext cx="10562590" cy="6783070"/>
+            <a:chOff x="1722" y="52"/>
+            <a:chExt cx="16634" cy="10682"/>
+          </a:xfrm>
+        </p:grpSpPr>
+        <p:sp>
+          <p:nvSpPr>
+            <p:cNvPr id="5" name="圆角矩形 4"/>
+            <p:cNvSpPr/>
+            <p:nvPr/>
+          </p:nvSpPr>
+          <p:spPr>
+            <a:xfrm>
+              <a:off x="1722" y="352"/>
+              <a:ext cx="16634" cy="10382"/>
+            </a:xfrm>
+            <a:prstGeom prst="roundRect">
+              <a:avLst/>
+            </a:prstGeom>
+            <a:solidFill>
+              <a:srgbClr val="E6E6FE"/>
+            </a:solidFill>
+          </p:spPr>
+          <p:style>
+            <a:lnRef idx="2">
+              <a:schemeClr val="accent1">
+                <a:lumMod val="75000"/>
+              </a:schemeClr>
+            </a:lnRef>
+            <a:fillRef idx="1">
+              <a:schemeClr val="accent1"/>
+            </a:fillRef>
+            <a:effectRef idx="0">
+              <a:srgbClr val="FFFFFF"/>
+            </a:effectRef>
+            <a:fontRef idx="minor">
+              <a:schemeClr val="lt1"/>
+            </a:fontRef>
+          </p:style>
+          <p:txBody>
+            <a:bodyPr rtlCol="0" anchor="t" anchorCtr="0"/>
+            <a:p>
+              <a:pPr algn="ctr"/>
+              <a:r>
+                <a:rPr lang="en-US" altLang="zh-CN" b="1">
+                  <a:solidFill>
+                    <a:srgbClr val="0700C9"/>
+                  </a:solidFill>
+                  <a:sym typeface="+mn-ea"/>
+                </a:rPr>
+                <a:t>UoA Robot Drone</a:t>
+              </a:r>
+              <a:endParaRPr lang="en-US" altLang="zh-CN" b="1">
+                <a:solidFill>
+                  <a:srgbClr val="0700C9"/>
+                </a:solidFill>
+                <a:sym typeface="+mn-ea"/>
+              </a:endParaRPr>
+            </a:p>
+          </p:txBody>
+        </p:sp>
+        <p:sp>
+          <p:nvSpPr>
+            <p:cNvPr id="6" name="圆角矩形 5"/>
+            <p:cNvSpPr/>
+            <p:nvPr/>
+          </p:nvSpPr>
+          <p:spPr>
+            <a:xfrm>
+              <a:off x="1895" y="1549"/>
+              <a:ext cx="3964" cy="7792"/>
+            </a:xfrm>
+            <a:prstGeom prst="roundRect">
+              <a:avLst/>
+            </a:prstGeom>
+            <a:solidFill>
+              <a:srgbClr val="C4E9FA"/>
+            </a:solidFill>
+            <a:ln>
+              <a:solidFill>
+                <a:schemeClr val="accent5"/>
+              </a:solidFill>
+            </a:ln>
+          </p:spPr>
+          <p:style>
+            <a:lnRef idx="2">
+              <a:schemeClr val="accent1">
+                <a:lumMod val="75000"/>
+              </a:schemeClr>
+            </a:lnRef>
+            <a:fillRef idx="1">
+              <a:schemeClr val="accent1"/>
+            </a:fillRef>
+            <a:effectRef idx="0">
+              <a:srgbClr val="FFFFFF"/>
+            </a:effectRef>
+            <a:fontRef idx="minor">
+              <a:schemeClr val="lt1"/>
+            </a:fontRef>
+          </p:style>
+          <p:txBody>
+            <a:bodyPr rtlCol="0" anchor="t" anchorCtr="0"/>
+            <a:p>
+              <a:pPr algn="ctr"/>
+              <a:r>
+                <a:rPr lang="en-US" altLang="zh-CN" b="1">
+                  <a:solidFill>
+                    <a:schemeClr val="tx1"/>
+                  </a:solidFill>
+                </a:rPr>
+                <a:t>Raspberry Pi</a:t>
+              </a:r>
+              <a:endParaRPr lang="en-US" altLang="zh-CN" b="1">
+                <a:solidFill>
+                  <a:schemeClr val="tx1"/>
+                </a:solidFill>
+              </a:endParaRPr>
+            </a:p>
+          </p:txBody>
+        </p:sp>
+        <p:sp>
+          <p:nvSpPr>
+            <p:cNvPr id="19" name="圆角矩形 18"/>
+            <p:cNvSpPr/>
+            <p:nvPr/>
+          </p:nvSpPr>
+          <p:spPr>
+            <a:xfrm>
+              <a:off x="2032" y="8033"/>
+              <a:ext cx="3693" cy="897"/>
+            </a:xfrm>
+            <a:prstGeom prst="roundRect">
+              <a:avLst/>
+            </a:prstGeom>
+            <a:solidFill>
+              <a:srgbClr val="C4E9FA"/>
+            </a:solidFill>
+            <a:ln>
+              <a:solidFill>
+                <a:schemeClr val="accent5"/>
+              </a:solidFill>
+            </a:ln>
+            <a:scene3d>
+              <a:camera prst="orthographicFront"/>
+              <a:lightRig rig="threePt" dir="t"/>
+            </a:scene3d>
+            <a:sp3d prstMaterial="metal"/>
+          </p:spPr>
+          <p:style>
+            <a:lnRef idx="2">
+              <a:schemeClr val="accent1">
+                <a:lumMod val="75000"/>
+              </a:schemeClr>
+            </a:lnRef>
+            <a:fillRef idx="1">
+              <a:schemeClr val="accent1"/>
+            </a:fillRef>
+            <a:effectRef idx="0">
+              <a:srgbClr val="FFFFFF"/>
+            </a:effectRef>
+            <a:fontRef idx="minor">
+              <a:schemeClr val="lt1"/>
+            </a:fontRef>
+          </p:style>
+          <p:txBody>
+            <a:bodyPr rtlCol="0" anchor="ctr"/>
+            <a:p>
+              <a:pPr algn="ctr"/>
+              <a:r>
+                <a:rPr lang="en-US" altLang="zh-CN" sz="1400">
+                  <a:solidFill>
+                    <a:schemeClr val="tx1"/>
+                  </a:solidFill>
+                </a:rPr>
+                <a:t>Ubuntu Server (L4T) </a:t>
+              </a:r>
+              <a:endParaRPr lang="en-US" altLang="zh-CN" sz="1400">
+                <a:solidFill>
+                  <a:schemeClr val="tx1"/>
+                </a:solidFill>
+              </a:endParaRPr>
+            </a:p>
+            <a:p>
+              <a:pPr algn="ctr"/>
+              <a:r>
+                <a:rPr lang="en-US" altLang="zh-CN" sz="1400">
+                  <a:solidFill>
+                    <a:schemeClr val="tx1"/>
+                  </a:solidFill>
+                </a:rPr>
+                <a:t>22.04 LTS</a:t>
+              </a:r>
+              <a:endParaRPr lang="en-US" altLang="zh-CN" sz="1400">
+                <a:solidFill>
+                  <a:schemeClr val="tx1"/>
+                </a:solidFill>
+              </a:endParaRPr>
+            </a:p>
+          </p:txBody>
+        </p:sp>
+        <p:sp>
+          <p:nvSpPr>
+            <p:cNvPr id="21" name="圆角矩形 20"/>
+            <p:cNvSpPr/>
+            <p:nvPr/>
+          </p:nvSpPr>
+          <p:spPr>
+            <a:xfrm>
+              <a:off x="2032" y="7364"/>
+              <a:ext cx="3693" cy="560"/>
+            </a:xfrm>
+            <a:prstGeom prst="roundRect">
+              <a:avLst/>
+            </a:prstGeom>
+            <a:solidFill>
+              <a:srgbClr val="C4E9FA"/>
+            </a:solidFill>
+            <a:ln>
+              <a:solidFill>
+                <a:schemeClr val="accent5"/>
+              </a:solidFill>
+            </a:ln>
+            <a:scene3d>
+              <a:camera prst="orthographicFront"/>
+              <a:lightRig rig="threePt" dir="t"/>
+            </a:scene3d>
+            <a:sp3d prstMaterial="metal"/>
+          </p:spPr>
+          <p:style>
+            <a:lnRef idx="2">
+              <a:schemeClr val="accent1">
+                <a:lumMod val="75000"/>
+              </a:schemeClr>
+            </a:lnRef>
+            <a:fillRef idx="1">
+              <a:schemeClr val="accent1"/>
+            </a:fillRef>
+            <a:effectRef idx="0">
+              <a:srgbClr val="FFFFFF"/>
+            </a:effectRef>
+            <a:fontRef idx="minor">
+              <a:schemeClr val="lt1"/>
+            </a:fontRef>
+          </p:style>
+          <p:txBody>
+            <a:bodyPr rtlCol="0" anchor="ctr"/>
+            <a:p>
+              <a:pPr algn="ctr"/>
+              <a:r>
+                <a:rPr lang="en-US" altLang="zh-CN" sz="1400">
+                  <a:solidFill>
+                    <a:schemeClr val="tx1"/>
+                  </a:solidFill>
+                  <a:sym typeface="+mn-ea"/>
+                </a:rPr>
+                <a:t>ROS2 Humble Hawksbill</a:t>
+              </a:r>
+              <a:endParaRPr lang="en-US" altLang="zh-CN" sz="1400">
+                <a:solidFill>
+                  <a:schemeClr val="tx1"/>
+                </a:solidFill>
+                <a:sym typeface="+mn-ea"/>
+              </a:endParaRPr>
+            </a:p>
+          </p:txBody>
+        </p:sp>
+        <p:sp>
+          <p:nvSpPr>
+            <p:cNvPr id="23" name="圆角矩形 22"/>
+            <p:cNvSpPr/>
+            <p:nvPr/>
+          </p:nvSpPr>
+          <p:spPr>
+            <a:xfrm>
+              <a:off x="2032" y="6694"/>
+              <a:ext cx="3693" cy="560"/>
+            </a:xfrm>
+            <a:prstGeom prst="roundRect">
+              <a:avLst/>
+            </a:prstGeom>
+            <a:solidFill>
+              <a:srgbClr val="C4E9FA"/>
+            </a:solidFill>
+            <a:ln>
+              <a:solidFill>
+                <a:schemeClr val="accent5"/>
+              </a:solidFill>
+            </a:ln>
+            <a:scene3d>
+              <a:camera prst="orthographicFront"/>
+              <a:lightRig rig="threePt" dir="t"/>
+            </a:scene3d>
+            <a:sp3d prstMaterial="metal"/>
+          </p:spPr>
+          <p:style>
+            <a:lnRef idx="2">
+              <a:schemeClr val="accent1">
+                <a:lumMod val="75000"/>
+              </a:schemeClr>
+            </a:lnRef>
+            <a:fillRef idx="1">
+              <a:schemeClr val="accent1"/>
+            </a:fillRef>
+            <a:effectRef idx="0">
+              <a:srgbClr val="FFFFFF"/>
+            </a:effectRef>
+            <a:fontRef idx="minor">
+              <a:schemeClr val="lt1"/>
+            </a:fontRef>
+          </p:style>
+          <p:txBody>
+            <a:bodyPr rtlCol="0" anchor="ctr"/>
+            <a:p>
+              <a:pPr algn="ctr"/>
+              <a:r>
+                <a:rPr lang="en-US" altLang="zh-CN" sz="1400">
+                  <a:solidFill>
+                    <a:schemeClr val="tx1"/>
+                  </a:solidFill>
+                  <a:sym typeface="+mn-ea"/>
+                </a:rPr>
+                <a:t>OpenCR</a:t>
+              </a:r>
+              <a:endParaRPr lang="en-US" altLang="zh-CN" sz="1400">
+                <a:solidFill>
+                  <a:schemeClr val="tx1"/>
+                </a:solidFill>
+                <a:sym typeface="+mn-ea"/>
+              </a:endParaRPr>
+            </a:p>
+          </p:txBody>
+        </p:sp>
+        <p:sp>
+          <p:nvSpPr>
+            <p:cNvPr id="24" name="圆角矩形 23"/>
+            <p:cNvSpPr/>
+            <p:nvPr/>
+          </p:nvSpPr>
+          <p:spPr>
+            <a:xfrm>
+              <a:off x="2042" y="4685"/>
+              <a:ext cx="3687" cy="560"/>
+            </a:xfrm>
+            <a:prstGeom prst="roundRect">
+              <a:avLst/>
+            </a:prstGeom>
+            <a:solidFill>
+              <a:srgbClr val="C4E9FA"/>
+            </a:solidFill>
+            <a:ln>
+              <a:solidFill>
+                <a:schemeClr val="accent5"/>
+              </a:solidFill>
+            </a:ln>
+            <a:scene3d>
+              <a:camera prst="orthographicFront"/>
+              <a:lightRig rig="threePt" dir="t"/>
+            </a:scene3d>
+            <a:sp3d prstMaterial="metal"/>
+          </p:spPr>
+          <p:style>
+            <a:lnRef idx="2">
+              <a:schemeClr val="accent1">
+                <a:lumMod val="75000"/>
+              </a:schemeClr>
+            </a:lnRef>
+            <a:fillRef idx="1">
+              <a:schemeClr val="accent1"/>
+            </a:fillRef>
+            <a:effectRef idx="0">
+              <a:srgbClr val="FFFFFF"/>
+            </a:effectRef>
+            <a:fontRef idx="minor">
+              <a:schemeClr val="lt1"/>
+            </a:fontRef>
+          </p:style>
+          <p:txBody>
+            <a:bodyPr rtlCol="0" anchor="ctr"/>
+            <a:p>
+              <a:pPr algn="ctr"/>
+              <a:r>
+                <a:rPr lang="en-US" altLang="zh-CN" sz="1400">
+                  <a:solidFill>
+                    <a:schemeClr val="tx1"/>
+                  </a:solidFill>
+                  <a:sym typeface="+mn-ea"/>
+                </a:rPr>
+                <a:t>Dynamixel SDK</a:t>
+              </a:r>
+              <a:endParaRPr lang="en-US" altLang="zh-CN" sz="1400">
+                <a:solidFill>
+                  <a:schemeClr val="tx1"/>
+                </a:solidFill>
+                <a:sym typeface="+mn-ea"/>
+              </a:endParaRPr>
+            </a:p>
+          </p:txBody>
+        </p:sp>
+        <p:sp>
+          <p:nvSpPr>
+            <p:cNvPr id="25" name="圆角矩形 24"/>
+            <p:cNvSpPr/>
+            <p:nvPr/>
+          </p:nvSpPr>
+          <p:spPr>
+            <a:xfrm>
+              <a:off x="2032" y="5355"/>
+              <a:ext cx="3693" cy="560"/>
+            </a:xfrm>
+            <a:prstGeom prst="roundRect">
+              <a:avLst/>
+            </a:prstGeom>
+            <a:solidFill>
+              <a:srgbClr val="C4E9FA"/>
+            </a:solidFill>
+            <a:ln>
+              <a:solidFill>
+                <a:schemeClr val="accent5"/>
+              </a:solidFill>
+            </a:ln>
+            <a:scene3d>
+              <a:camera prst="orthographicFront"/>
+              <a:lightRig rig="threePt" dir="t"/>
+            </a:scene3d>
+            <a:sp3d prstMaterial="metal"/>
+          </p:spPr>
+          <p:style>
+            <a:lnRef idx="2">
+              <a:schemeClr val="accent1">
+                <a:lumMod val="75000"/>
+              </a:schemeClr>
+            </a:lnRef>
+            <a:fillRef idx="1">
+              <a:schemeClr val="accent1"/>
+            </a:fillRef>
+            <a:effectRef idx="0">
+              <a:srgbClr val="FFFFFF"/>
+            </a:effectRef>
+            <a:fontRef idx="minor">
+              <a:schemeClr val="lt1"/>
+            </a:fontRef>
+          </p:style>
+          <p:txBody>
+            <a:bodyPr rtlCol="0" anchor="ctr"/>
+            <a:p>
+              <a:pPr algn="ctr"/>
+              <a:r>
+                <a:rPr lang="en-US" altLang="zh-CN" sz="1400">
+                  <a:solidFill>
+                    <a:schemeClr val="tx1"/>
+                  </a:solidFill>
+                  <a:sym typeface="+mn-ea"/>
+                </a:rPr>
+                <a:t>python3-colcon</a:t>
+              </a:r>
+              <a:endParaRPr lang="en-US" altLang="zh-CN" sz="1400">
+                <a:solidFill>
+                  <a:schemeClr val="tx1"/>
+                </a:solidFill>
+                <a:sym typeface="+mn-ea"/>
+              </a:endParaRPr>
+            </a:p>
+          </p:txBody>
+        </p:sp>
+        <p:sp>
+          <p:nvSpPr>
+            <p:cNvPr id="33" name="圆角矩形 32"/>
+            <p:cNvSpPr/>
+            <p:nvPr/>
+          </p:nvSpPr>
+          <p:spPr>
+            <a:xfrm>
+              <a:off x="2043" y="2474"/>
+              <a:ext cx="3685" cy="2094"/>
+            </a:xfrm>
+            <a:prstGeom prst="roundRect">
+              <a:avLst/>
+            </a:prstGeom>
+            <a:solidFill>
+              <a:srgbClr val="C4E9FA"/>
+            </a:solidFill>
+            <a:ln>
+              <a:solidFill>
+                <a:schemeClr val="accent5"/>
+              </a:solidFill>
+            </a:ln>
+            <a:scene3d>
+              <a:camera prst="orthographicFront"/>
+              <a:lightRig rig="threePt" dir="t"/>
+            </a:scene3d>
+            <a:sp3d prstMaterial="metal"/>
+          </p:spPr>
+          <p:style>
+            <a:lnRef idx="2">
+              <a:schemeClr val="accent1">
+                <a:lumMod val="75000"/>
+              </a:schemeClr>
+            </a:lnRef>
+            <a:fillRef idx="1">
+              <a:schemeClr val="accent1"/>
+            </a:fillRef>
+            <a:effectRef idx="0">
+              <a:srgbClr val="FFFFFF"/>
+            </a:effectRef>
+            <a:fontRef idx="minor">
+              <a:schemeClr val="lt1"/>
+            </a:fontRef>
+          </p:style>
+          <p:txBody>
+            <a:bodyPr rtlCol="0" anchor="t" anchorCtr="0"/>
+            <a:p>
+              <a:pPr algn="ctr"/>
+              <a:r>
+                <a:rPr lang="en-US" altLang="zh-CN" sz="1400" b="1">
+                  <a:solidFill>
+                    <a:schemeClr val="tx1"/>
+                  </a:solidFill>
+                </a:rPr>
+                <a:t>Turtlebot3</a:t>
+              </a:r>
+              <a:endParaRPr lang="en-US" altLang="zh-CN" sz="1400" b="1">
+                <a:solidFill>
+                  <a:schemeClr val="tx1"/>
+                </a:solidFill>
+              </a:endParaRPr>
+            </a:p>
+          </p:txBody>
+        </p:sp>
+        <p:sp>
+          <p:nvSpPr>
+            <p:cNvPr id="22" name="圆角矩形 21"/>
+            <p:cNvSpPr/>
+            <p:nvPr/>
+          </p:nvSpPr>
+          <p:spPr>
+            <a:xfrm>
+              <a:off x="2161" y="3136"/>
+              <a:ext cx="3402" cy="526"/>
+            </a:xfrm>
+            <a:prstGeom prst="roundRect">
+              <a:avLst/>
+            </a:prstGeom>
+            <a:solidFill>
+              <a:srgbClr val="C4E9FA"/>
+            </a:solidFill>
+            <a:ln>
+              <a:solidFill>
+                <a:schemeClr val="accent5"/>
+              </a:solidFill>
+            </a:ln>
+            <a:scene3d>
+              <a:camera prst="orthographicFront"/>
+              <a:lightRig rig="threePt" dir="t"/>
+            </a:scene3d>
+            <a:sp3d prstMaterial="metal"/>
+          </p:spPr>
+          <p:style>
+            <a:lnRef idx="2">
+              <a:schemeClr val="accent1">
+                <a:lumMod val="75000"/>
+              </a:schemeClr>
+            </a:lnRef>
+            <a:fillRef idx="1">
+              <a:schemeClr val="accent1"/>
+            </a:fillRef>
+            <a:effectRef idx="0">
+              <a:srgbClr val="FFFFFF"/>
+            </a:effectRef>
+            <a:fontRef idx="minor">
+              <a:schemeClr val="lt1"/>
+            </a:fontRef>
+          </p:style>
+          <p:txBody>
+            <a:bodyPr rtlCol="0" anchor="ctr"/>
+            <a:p>
+              <a:pPr algn="ctr"/>
+              <a:r>
+                <a:rPr lang="en-US" altLang="zh-CN" sz="1400">
+                  <a:solidFill>
+                    <a:schemeClr val="tx1"/>
+                  </a:solidFill>
+                  <a:sym typeface="+mn-ea"/>
+                </a:rPr>
+                <a:t>turtlebot3_bringup</a:t>
+              </a:r>
+              <a:endParaRPr lang="en-US" altLang="zh-CN" sz="1400">
+                <a:solidFill>
+                  <a:schemeClr val="tx1"/>
+                </a:solidFill>
+                <a:sym typeface="+mn-ea"/>
+              </a:endParaRPr>
+            </a:p>
+          </p:txBody>
+        </p:sp>
+        <p:sp>
+          <p:nvSpPr>
+            <p:cNvPr id="26" name="圆角矩形 25"/>
+            <p:cNvSpPr/>
+            <p:nvPr/>
+          </p:nvSpPr>
+          <p:spPr>
+            <a:xfrm>
+              <a:off x="2161" y="3891"/>
+              <a:ext cx="3402" cy="526"/>
+            </a:xfrm>
+            <a:prstGeom prst="roundRect">
+              <a:avLst/>
+            </a:prstGeom>
+            <a:solidFill>
+              <a:srgbClr val="C4E9FA"/>
+            </a:solidFill>
+            <a:ln>
+              <a:solidFill>
+                <a:schemeClr val="accent5"/>
+              </a:solidFill>
+            </a:ln>
+            <a:scene3d>
+              <a:camera prst="orthographicFront"/>
+              <a:lightRig rig="threePt" dir="t"/>
+            </a:scene3d>
+            <a:sp3d prstMaterial="metal"/>
+          </p:spPr>
+          <p:style>
+            <a:lnRef idx="2">
+              <a:schemeClr val="accent1">
+                <a:lumMod val="75000"/>
+              </a:schemeClr>
+            </a:lnRef>
+            <a:fillRef idx="1">
+              <a:schemeClr val="accent1"/>
+            </a:fillRef>
+            <a:effectRef idx="0">
+              <a:srgbClr val="FFFFFF"/>
+            </a:effectRef>
+            <a:fontRef idx="minor">
+              <a:schemeClr val="lt1"/>
+            </a:fontRef>
+          </p:style>
+          <p:txBody>
+            <a:bodyPr rtlCol="0" anchor="ctr"/>
+            <a:p>
+              <a:pPr algn="ctr"/>
+              <a:r>
+                <a:rPr lang="en-US" altLang="zh-CN" sz="1400">
+                  <a:solidFill>
+                    <a:schemeClr val="tx1"/>
+                  </a:solidFill>
+                  <a:sym typeface="+mn-ea"/>
+                </a:rPr>
+                <a:t>turtlebot3-msgs</a:t>
+              </a:r>
+              <a:endParaRPr lang="en-US" altLang="zh-CN" sz="1400">
+                <a:solidFill>
+                  <a:schemeClr val="tx1"/>
+                </a:solidFill>
+                <a:sym typeface="+mn-ea"/>
+              </a:endParaRPr>
+            </a:p>
+          </p:txBody>
+        </p:sp>
+        <p:sp>
+          <p:nvSpPr>
+            <p:cNvPr id="27" name="圆角矩形 26"/>
+            <p:cNvSpPr/>
+            <p:nvPr/>
+          </p:nvSpPr>
+          <p:spPr>
+            <a:xfrm>
+              <a:off x="2032" y="6024"/>
+              <a:ext cx="3693" cy="560"/>
+            </a:xfrm>
+            <a:prstGeom prst="roundRect">
+              <a:avLst/>
+            </a:prstGeom>
+            <a:solidFill>
+              <a:srgbClr val="C4E9FA"/>
+            </a:solidFill>
+            <a:ln>
+              <a:solidFill>
+                <a:schemeClr val="accent5"/>
+              </a:solidFill>
+            </a:ln>
+            <a:scene3d>
+              <a:camera prst="orthographicFront"/>
+              <a:lightRig rig="threePt" dir="t"/>
+            </a:scene3d>
+            <a:sp3d prstMaterial="metal"/>
+          </p:spPr>
+          <p:style>
+            <a:lnRef idx="2">
+              <a:schemeClr val="accent1">
+                <a:lumMod val="75000"/>
+              </a:schemeClr>
+            </a:lnRef>
+            <a:fillRef idx="1">
+              <a:schemeClr val="accent1"/>
+            </a:fillRef>
+            <a:effectRef idx="0">
+              <a:srgbClr val="FFFFFF"/>
+            </a:effectRef>
+            <a:fontRef idx="minor">
+              <a:schemeClr val="lt1"/>
+            </a:fontRef>
+          </p:style>
+          <p:txBody>
+            <a:bodyPr rtlCol="0" anchor="ctr"/>
+            <a:p>
+              <a:pPr algn="ctr"/>
+              <a:r>
+                <a:rPr lang="en-US" altLang="zh-CN" sz="1400">
+                  <a:solidFill>
+                    <a:schemeClr val="tx1"/>
+                  </a:solidFill>
+                  <a:sym typeface="+mn-ea"/>
+                </a:rPr>
+                <a:t>coin_d4_driver</a:t>
+              </a:r>
+              <a:endParaRPr lang="en-US" altLang="zh-CN" sz="1400">
+                <a:solidFill>
+                  <a:schemeClr val="tx1"/>
+                </a:solidFill>
+                <a:sym typeface="+mn-ea"/>
+              </a:endParaRPr>
+            </a:p>
+          </p:txBody>
+        </p:sp>
+        <p:sp>
+          <p:nvSpPr>
+            <p:cNvPr id="28" name="圆角矩形 27"/>
+            <p:cNvSpPr/>
+            <p:nvPr/>
+          </p:nvSpPr>
+          <p:spPr>
+            <a:xfrm>
+              <a:off x="5943" y="1552"/>
+              <a:ext cx="6123" cy="7767"/>
+            </a:xfrm>
+            <a:prstGeom prst="roundRect">
+              <a:avLst/>
+            </a:prstGeom>
+            <a:solidFill>
+              <a:srgbClr val="CBFFCE"/>
+            </a:solidFill>
+            <a:ln>
+              <a:solidFill>
+                <a:srgbClr val="00B050"/>
+              </a:solidFill>
+            </a:ln>
+          </p:spPr>
+          <p:style>
+            <a:lnRef idx="2">
+              <a:schemeClr val="accent1">
+                <a:lumMod val="75000"/>
+              </a:schemeClr>
+            </a:lnRef>
+            <a:fillRef idx="1">
+              <a:schemeClr val="accent1"/>
+            </a:fillRef>
+            <a:effectRef idx="0">
+              <a:srgbClr val="FFFFFF"/>
+            </a:effectRef>
+            <a:fontRef idx="minor">
+              <a:schemeClr val="lt1"/>
+            </a:fontRef>
+          </p:style>
+          <p:txBody>
+            <a:bodyPr rtlCol="0" anchor="t" anchorCtr="0"/>
+            <a:p>
+              <a:pPr algn="ctr"/>
+              <a:r>
+                <a:rPr lang="en-US" altLang="zh-CN" b="1">
+                  <a:solidFill>
+                    <a:schemeClr val="tx1"/>
+                  </a:solidFill>
+                </a:rPr>
+                <a:t>Jetson Orin Nano</a:t>
+              </a:r>
+              <a:endParaRPr lang="en-US" altLang="zh-CN" b="1">
+                <a:solidFill>
+                  <a:schemeClr val="tx1"/>
+                </a:solidFill>
+              </a:endParaRPr>
+            </a:p>
+          </p:txBody>
+        </p:sp>
+        <p:sp>
+          <p:nvSpPr>
+            <p:cNvPr id="18" name="圆角矩形 17"/>
+            <p:cNvSpPr/>
+            <p:nvPr/>
+          </p:nvSpPr>
+          <p:spPr>
+            <a:xfrm>
+              <a:off x="6210" y="8208"/>
+              <a:ext cx="5604" cy="678"/>
+            </a:xfrm>
+            <a:prstGeom prst="roundRect">
+              <a:avLst/>
+            </a:prstGeom>
+            <a:solidFill>
+              <a:srgbClr val="CBFFCE"/>
+            </a:solidFill>
+            <a:ln>
+              <a:solidFill>
+                <a:srgbClr val="00B050"/>
+              </a:solidFill>
+            </a:ln>
+            <a:scene3d>
+              <a:camera prst="orthographicFront"/>
+              <a:lightRig rig="threePt" dir="t"/>
+            </a:scene3d>
+            <a:sp3d prstMaterial="metal"/>
+          </p:spPr>
+          <p:style>
+            <a:lnRef idx="2">
+              <a:schemeClr val="accent1">
+                <a:lumMod val="75000"/>
+              </a:schemeClr>
+            </a:lnRef>
+            <a:fillRef idx="1">
+              <a:schemeClr val="accent1"/>
+            </a:fillRef>
+            <a:effectRef idx="0">
+              <a:srgbClr val="FFFFFF"/>
+            </a:effectRef>
+            <a:fontRef idx="minor">
+              <a:schemeClr val="lt1"/>
+            </a:fontRef>
+          </p:style>
+          <p:txBody>
+            <a:bodyPr rtlCol="0" anchor="ctr"/>
+            <a:p>
+              <a:pPr algn="ctr"/>
+              <a:r>
+                <a:rPr lang="en-US" altLang="zh-CN" sz="1400">
+                  <a:solidFill>
+                    <a:schemeClr val="tx1"/>
+                  </a:solidFill>
+                </a:rPr>
+                <a:t>Jet Pack Jetson Linux (L4T) 22.04 LTS</a:t>
+              </a:r>
+              <a:endParaRPr lang="en-US" altLang="zh-CN" sz="1400">
+                <a:solidFill>
+                  <a:schemeClr val="tx1"/>
+                </a:solidFill>
+              </a:endParaRPr>
+            </a:p>
+          </p:txBody>
+        </p:sp>
+        <p:sp>
+          <p:nvSpPr>
+            <p:cNvPr id="30" name="圆角矩形 29"/>
+            <p:cNvSpPr/>
+            <p:nvPr/>
+          </p:nvSpPr>
+          <p:spPr>
+            <a:xfrm>
+              <a:off x="6210" y="7525"/>
+              <a:ext cx="5604" cy="560"/>
+            </a:xfrm>
+            <a:prstGeom prst="roundRect">
+              <a:avLst/>
+            </a:prstGeom>
+            <a:solidFill>
+              <a:srgbClr val="CBFFCE"/>
+            </a:solidFill>
+            <a:ln>
+              <a:solidFill>
+                <a:srgbClr val="00B050"/>
+              </a:solidFill>
+            </a:ln>
+            <a:scene3d>
+              <a:camera prst="orthographicFront"/>
+              <a:lightRig rig="threePt" dir="t"/>
+            </a:scene3d>
+            <a:sp3d prstMaterial="metal"/>
+          </p:spPr>
+          <p:style>
+            <a:lnRef idx="2">
+              <a:schemeClr val="accent1">
+                <a:lumMod val="75000"/>
+              </a:schemeClr>
+            </a:lnRef>
+            <a:fillRef idx="1">
+              <a:schemeClr val="accent1"/>
+            </a:fillRef>
+            <a:effectRef idx="0">
+              <a:srgbClr val="FFFFFF"/>
+            </a:effectRef>
+            <a:fontRef idx="minor">
+              <a:schemeClr val="lt1"/>
+            </a:fontRef>
+          </p:style>
+          <p:txBody>
+            <a:bodyPr rtlCol="0" anchor="ctr"/>
+            <a:p>
+              <a:pPr algn="ctr"/>
+              <a:r>
+                <a:rPr lang="en-US" altLang="zh-CN" sz="1400">
+                  <a:solidFill>
+                    <a:schemeClr val="tx1"/>
+                  </a:solidFill>
+                  <a:sym typeface="+mn-ea"/>
+                </a:rPr>
+                <a:t>ROS2 Humble Hawksbill</a:t>
+              </a:r>
+              <a:endParaRPr lang="en-US" altLang="zh-CN" sz="1400">
+                <a:solidFill>
+                  <a:schemeClr val="tx1"/>
+                </a:solidFill>
+                <a:sym typeface="+mn-ea"/>
+              </a:endParaRPr>
+            </a:p>
+          </p:txBody>
+        </p:sp>
+        <p:sp>
+          <p:nvSpPr>
+            <p:cNvPr id="10" name="圆角矩形 9"/>
+            <p:cNvSpPr/>
+            <p:nvPr/>
+          </p:nvSpPr>
+          <p:spPr>
+            <a:xfrm>
+              <a:off x="6210" y="6106"/>
+              <a:ext cx="5608" cy="559"/>
+            </a:xfrm>
+            <a:prstGeom prst="roundRect">
+              <a:avLst/>
+            </a:prstGeom>
+            <a:solidFill>
+              <a:srgbClr val="CBFFCE"/>
+            </a:solidFill>
+            <a:ln>
+              <a:solidFill>
+                <a:srgbClr val="00B050"/>
+              </a:solidFill>
+            </a:ln>
+            <a:scene3d>
+              <a:camera prst="orthographicFront"/>
+              <a:lightRig rig="threePt" dir="t"/>
+            </a:scene3d>
+            <a:sp3d prstMaterial="metal"/>
+          </p:spPr>
+          <p:style>
+            <a:lnRef idx="2">
+              <a:schemeClr val="accent1">
+                <a:lumMod val="75000"/>
+              </a:schemeClr>
+            </a:lnRef>
+            <a:fillRef idx="1">
+              <a:schemeClr val="accent1"/>
+            </a:fillRef>
+            <a:effectRef idx="0">
+              <a:srgbClr val="FFFFFF"/>
+            </a:effectRef>
+            <a:fontRef idx="minor">
+              <a:schemeClr val="lt1"/>
+            </a:fontRef>
+          </p:style>
+          <p:txBody>
+            <a:bodyPr vertOverflow="overflow" horzOverflow="overflow" vert="horz" wrap="square" numCol="1" spcCol="0" rtlCol="0" fromWordArt="0" anchor="ctr" anchorCtr="0" forceAA="0" compatLnSpc="1">
+              <a:noAutofit/>
+            </a:bodyPr>
+            <a:p>
+              <a:pPr lvl="0" algn="ctr">
+                <a:buClrTx/>
+                <a:buSzTx/>
+                <a:buFontTx/>
+              </a:pPr>
+              <a:r>
+                <a:rPr lang="en-US" altLang="zh-CN" sz="1400">
+                  <a:solidFill>
+                    <a:schemeClr val="tx1"/>
+                  </a:solidFill>
+                  <a:sym typeface="+mn-ea"/>
+                </a:rPr>
+                <a:t>NVIDIA CUDA</a:t>
+              </a:r>
+              <a:endParaRPr lang="en-US" altLang="zh-CN" sz="1400">
+                <a:solidFill>
+                  <a:schemeClr val="tx1"/>
+                </a:solidFill>
+                <a:sym typeface="+mn-ea"/>
+              </a:endParaRPr>
+            </a:p>
+          </p:txBody>
+        </p:sp>
+        <p:grpSp>
+          <p:nvGrpSpPr>
+            <p:cNvPr id="75" name="组合 74"/>
+            <p:cNvGrpSpPr/>
+            <p:nvPr/>
+          </p:nvGrpSpPr>
+          <p:grpSpPr>
+            <a:xfrm rot="0">
+              <a:off x="6203" y="4454"/>
+              <a:ext cx="5610" cy="1538"/>
+              <a:chOff x="6203" y="4681"/>
+              <a:chExt cx="5610" cy="1484"/>
+            </a:xfrm>
+            <a:solidFill>
+              <a:srgbClr val="CBFFCE"/>
+            </a:solidFill>
+          </p:grpSpPr>
+          <p:sp>
+            <p:nvSpPr>
+              <p:cNvPr id="31" name="圆角矩形 30"/>
+              <p:cNvSpPr/>
+              <p:nvPr/>
+            </p:nvSpPr>
+            <p:spPr>
+              <a:xfrm>
+                <a:off x="6203" y="4681"/>
+                <a:ext cx="5610" cy="1485"/>
+              </a:xfrm>
+              <a:prstGeom prst="roundRect">
+                <a:avLst/>
+              </a:prstGeom>
+              <a:grpFill/>
+              <a:ln>
+                <a:solidFill>
+                  <a:srgbClr val="00B050"/>
+                </a:solidFill>
+              </a:ln>
+              <a:scene3d>
+                <a:camera prst="orthographicFront"/>
+                <a:lightRig rig="threePt" dir="t"/>
+              </a:scene3d>
+              <a:sp3d prstMaterial="metal"/>
+            </p:spPr>
+            <p:style>
+              <a:lnRef idx="2">
+                <a:schemeClr val="accent1">
+                  <a:lumMod val="75000"/>
+                </a:schemeClr>
+              </a:lnRef>
+              <a:fillRef idx="1">
+                <a:schemeClr val="accent1"/>
+              </a:fillRef>
+              <a:effectRef idx="0">
+                <a:srgbClr val="FFFFFF"/>
+              </a:effectRef>
+              <a:fontRef idx="minor">
+                <a:schemeClr val="lt1"/>
+              </a:fontRef>
+            </p:style>
+            <p:txBody>
+              <a:bodyPr rtlCol="0" anchor="ctr"/>
+              <a:p>
+                <a:pPr algn="l"/>
+                <a:r>
+                  <a:rPr lang="en-US" altLang="zh-CN">
+                    <a:solidFill>
+                      <a:schemeClr val="tx1"/>
+                    </a:solidFill>
+                  </a:rPr>
+                  <a:t>ZED</a:t>
+                </a:r>
+                <a:endParaRPr lang="en-US" altLang="zh-CN">
+                  <a:solidFill>
+                    <a:schemeClr val="tx1"/>
+                  </a:solidFill>
+                </a:endParaRPr>
+              </a:p>
+            </p:txBody>
+          </p:sp>
+          <p:sp>
+            <p:nvSpPr>
+              <p:cNvPr id="8" name="圆角矩形 7"/>
+              <p:cNvSpPr/>
+              <p:nvPr/>
+            </p:nvSpPr>
+            <p:spPr>
+              <a:xfrm>
+                <a:off x="7106" y="5493"/>
+                <a:ext cx="4539" cy="518"/>
+              </a:xfrm>
+              <a:prstGeom prst="roundRect">
+                <a:avLst/>
+              </a:prstGeom>
+              <a:grpFill/>
+              <a:ln>
+                <a:solidFill>
+                  <a:srgbClr val="00B050"/>
+                </a:solidFill>
+              </a:ln>
+              <a:scene3d>
+                <a:camera prst="orthographicFront"/>
+                <a:lightRig rig="threePt" dir="t"/>
+              </a:scene3d>
+              <a:sp3d prstMaterial="metal"/>
+            </p:spPr>
+            <p:style>
+              <a:lnRef idx="2">
+                <a:schemeClr val="accent1">
+                  <a:lumMod val="75000"/>
+                </a:schemeClr>
+              </a:lnRef>
+              <a:fillRef idx="1">
+                <a:schemeClr val="accent1"/>
+              </a:fillRef>
+              <a:effectRef idx="0">
+                <a:srgbClr val="FFFFFF"/>
+              </a:effectRef>
+              <a:fontRef idx="minor">
+                <a:schemeClr val="lt1"/>
+              </a:fontRef>
+            </p:style>
+            <p:txBody>
+              <a:bodyPr rtlCol="0" anchor="ctr"/>
+              <a:p>
+                <a:pPr algn="ctr"/>
+                <a:r>
+                  <a:rPr lang="en-US" altLang="zh-CN" sz="1400">
+                    <a:solidFill>
+                      <a:schemeClr val="tx1"/>
+                    </a:solidFill>
+                  </a:rPr>
+                  <a:t>ZED SDK</a:t>
+                </a:r>
+                <a:endParaRPr lang="en-US" altLang="zh-CN" sz="1400">
+                  <a:solidFill>
+                    <a:schemeClr val="tx1"/>
+                  </a:solidFill>
+                </a:endParaRPr>
+              </a:p>
+            </p:txBody>
+          </p:sp>
+          <p:sp>
+            <p:nvSpPr>
+              <p:cNvPr id="9" name="圆角矩形 8"/>
+              <p:cNvSpPr/>
+              <p:nvPr/>
+            </p:nvSpPr>
+            <p:spPr>
+              <a:xfrm>
+                <a:off x="7104" y="4827"/>
+                <a:ext cx="4545" cy="518"/>
+              </a:xfrm>
+              <a:prstGeom prst="roundRect">
+                <a:avLst/>
+              </a:prstGeom>
+              <a:grpFill/>
+              <a:ln>
+                <a:solidFill>
+                  <a:srgbClr val="00B050"/>
+                </a:solidFill>
+              </a:ln>
+              <a:scene3d>
+                <a:camera prst="orthographicFront"/>
+                <a:lightRig rig="threePt" dir="t"/>
+              </a:scene3d>
+              <a:sp3d prstMaterial="metal"/>
+            </p:spPr>
+            <p:style>
+              <a:lnRef idx="2">
+                <a:schemeClr val="accent1">
+                  <a:lumMod val="75000"/>
+                </a:schemeClr>
+              </a:lnRef>
+              <a:fillRef idx="1">
+                <a:schemeClr val="accent1"/>
+              </a:fillRef>
+              <a:effectRef idx="0">
+                <a:srgbClr val="FFFFFF"/>
+              </a:effectRef>
+              <a:fontRef idx="minor">
+                <a:schemeClr val="lt1"/>
+              </a:fontRef>
+            </p:style>
+            <p:txBody>
+              <a:bodyPr rtlCol="0" anchor="ctr"/>
+              <a:p>
+                <a:pPr algn="ctr"/>
+                <a:r>
+                  <a:rPr lang="en-US" altLang="zh-CN" sz="1400">
+                    <a:solidFill>
+                      <a:schemeClr val="tx1"/>
+                    </a:solidFill>
+                  </a:rPr>
+                  <a:t>zed-ros2-wrapper</a:t>
+                </a:r>
+                <a:endParaRPr lang="en-US" altLang="zh-CN" sz="1400">
+                  <a:solidFill>
+                    <a:schemeClr val="tx1"/>
+                  </a:solidFill>
+                </a:endParaRPr>
+              </a:p>
+            </p:txBody>
+          </p:sp>
+        </p:grpSp>
+        <p:sp>
+          <p:nvSpPr>
+            <p:cNvPr id="16" name="圆角矩形 15"/>
+            <p:cNvSpPr/>
+            <p:nvPr/>
+          </p:nvSpPr>
+          <p:spPr>
+            <a:xfrm>
+              <a:off x="6203" y="2475"/>
+              <a:ext cx="2730" cy="1803"/>
+            </a:xfrm>
+            <a:prstGeom prst="roundRect">
+              <a:avLst/>
+            </a:prstGeom>
+            <a:solidFill>
+              <a:srgbClr val="CBFFCE"/>
+            </a:solidFill>
+            <a:ln>
+              <a:solidFill>
+                <a:srgbClr val="00B050"/>
+              </a:solidFill>
+            </a:ln>
+            <a:scene3d>
+              <a:camera prst="orthographicFront"/>
+              <a:lightRig rig="threePt" dir="t"/>
+            </a:scene3d>
+            <a:sp3d prstMaterial="metal"/>
+          </p:spPr>
+          <p:style>
+            <a:lnRef idx="2">
+              <a:schemeClr val="accent1">
+                <a:lumMod val="75000"/>
+              </a:schemeClr>
+            </a:lnRef>
+            <a:fillRef idx="1">
+              <a:schemeClr val="accent1"/>
+            </a:fillRef>
+            <a:effectRef idx="0">
+              <a:srgbClr val="FFFFFF"/>
+            </a:effectRef>
+            <a:fontRef idx="minor">
+              <a:schemeClr val="lt1"/>
+            </a:fontRef>
+          </p:style>
+          <p:txBody>
+            <a:bodyPr rtlCol="0" anchor="t" anchorCtr="0"/>
+            <a:p>
+              <a:pPr algn="ctr"/>
+              <a:r>
+                <a:rPr lang="en-US" altLang="zh-CN" sz="1400" b="1">
+                  <a:solidFill>
+                    <a:schemeClr val="tx1"/>
+                  </a:solidFill>
+                </a:rPr>
+                <a:t>RTAB-Map</a:t>
+              </a:r>
+              <a:endParaRPr lang="en-US" altLang="zh-CN" sz="1400" b="1">
+                <a:solidFill>
+                  <a:schemeClr val="tx1"/>
+                </a:solidFill>
+              </a:endParaRPr>
+            </a:p>
+          </p:txBody>
+        </p:sp>
+        <p:sp>
+          <p:nvSpPr>
+            <p:cNvPr id="14" name="圆角矩形 13"/>
+            <p:cNvSpPr/>
+            <p:nvPr/>
+          </p:nvSpPr>
+          <p:spPr>
+            <a:xfrm>
+              <a:off x="6370" y="3147"/>
+              <a:ext cx="2433" cy="515"/>
+            </a:xfrm>
+            <a:prstGeom prst="roundRect">
+              <a:avLst/>
+            </a:prstGeom>
+            <a:solidFill>
+              <a:srgbClr val="CBFFCE"/>
+            </a:solidFill>
+            <a:ln>
+              <a:solidFill>
+                <a:srgbClr val="00B050"/>
+              </a:solidFill>
+            </a:ln>
+            <a:scene3d>
+              <a:camera prst="orthographicFront"/>
+              <a:lightRig rig="threePt" dir="t"/>
+            </a:scene3d>
+            <a:sp3d prstMaterial="metal"/>
+          </p:spPr>
+          <p:style>
+            <a:lnRef idx="2">
+              <a:schemeClr val="accent1">
+                <a:lumMod val="75000"/>
+              </a:schemeClr>
+            </a:lnRef>
+            <a:fillRef idx="1">
+              <a:schemeClr val="accent1"/>
+            </a:fillRef>
+            <a:effectRef idx="0">
+              <a:srgbClr val="FFFFFF"/>
+            </a:effectRef>
+            <a:fontRef idx="minor">
+              <a:schemeClr val="lt1"/>
+            </a:fontRef>
+          </p:style>
+          <p:txBody>
+            <a:bodyPr rtlCol="0" anchor="ctr"/>
+            <a:p>
+              <a:pPr algn="ctr"/>
+              <a:r>
+                <a:rPr lang="en-US" altLang="zh-CN" sz="1400">
+                  <a:solidFill>
+                    <a:schemeClr val="tx1"/>
+                  </a:solidFill>
+                </a:rPr>
+                <a:t>Visual Odometry</a:t>
+              </a:r>
+              <a:endParaRPr lang="en-US" altLang="zh-CN" sz="1400">
+                <a:solidFill>
+                  <a:schemeClr val="tx1"/>
+                </a:solidFill>
+              </a:endParaRPr>
+            </a:p>
+          </p:txBody>
+        </p:sp>
+        <p:sp>
+          <p:nvSpPr>
+            <p:cNvPr id="35" name="圆角矩形 34"/>
+            <p:cNvSpPr/>
+            <p:nvPr/>
+          </p:nvSpPr>
+          <p:spPr>
+            <a:xfrm>
+              <a:off x="6370" y="3723"/>
+              <a:ext cx="2433" cy="447"/>
+            </a:xfrm>
+            <a:prstGeom prst="roundRect">
+              <a:avLst/>
+            </a:prstGeom>
+            <a:solidFill>
+              <a:srgbClr val="CBFFCE"/>
+            </a:solidFill>
+            <a:ln>
+              <a:solidFill>
+                <a:srgbClr val="00B050"/>
+              </a:solidFill>
+            </a:ln>
+            <a:scene3d>
+              <a:camera prst="orthographicFront"/>
+              <a:lightRig rig="threePt" dir="t"/>
+            </a:scene3d>
+            <a:sp3d prstMaterial="metal"/>
+          </p:spPr>
+          <p:style>
+            <a:lnRef idx="2">
+              <a:schemeClr val="accent1">
+                <a:lumMod val="75000"/>
+              </a:schemeClr>
+            </a:lnRef>
+            <a:fillRef idx="1">
+              <a:schemeClr val="accent1"/>
+            </a:fillRef>
+            <a:effectRef idx="0">
+              <a:srgbClr val="FFFFFF"/>
+            </a:effectRef>
+            <a:fontRef idx="minor">
+              <a:schemeClr val="lt1"/>
+            </a:fontRef>
+          </p:style>
+          <p:txBody>
+            <a:bodyPr rtlCol="0" anchor="ctr"/>
+            <a:p>
+              <a:pPr algn="ctr"/>
+              <a:r>
+                <a:rPr lang="en-US" altLang="zh-CN" sz="1400">
+                  <a:solidFill>
+                    <a:schemeClr val="tx1"/>
+                  </a:solidFill>
+                </a:rPr>
+                <a:t>Visual SLAM</a:t>
+              </a:r>
+              <a:endParaRPr lang="en-US" altLang="zh-CN" sz="1400">
+                <a:solidFill>
+                  <a:schemeClr val="tx1"/>
+                </a:solidFill>
+              </a:endParaRPr>
+            </a:p>
+          </p:txBody>
+        </p:sp>
+        <p:sp>
+          <p:nvSpPr>
+            <p:cNvPr id="39" name="圆角矩形 38"/>
+            <p:cNvSpPr/>
+            <p:nvPr/>
+          </p:nvSpPr>
+          <p:spPr>
+            <a:xfrm>
+              <a:off x="9068" y="2452"/>
+              <a:ext cx="2758" cy="1827"/>
+            </a:xfrm>
+            <a:prstGeom prst="roundRect">
+              <a:avLst/>
+            </a:prstGeom>
+            <a:solidFill>
+              <a:srgbClr val="CBFFCE"/>
+            </a:solidFill>
+            <a:ln>
+              <a:solidFill>
+                <a:srgbClr val="00B050"/>
+              </a:solidFill>
+            </a:ln>
+            <a:scene3d>
+              <a:camera prst="orthographicFront"/>
+              <a:lightRig rig="threePt" dir="t"/>
+            </a:scene3d>
+            <a:sp3d prstMaterial="metal"/>
+          </p:spPr>
+          <p:style>
+            <a:lnRef idx="2">
+              <a:schemeClr val="accent1">
+                <a:lumMod val="75000"/>
+              </a:schemeClr>
+            </a:lnRef>
+            <a:fillRef idx="1">
+              <a:schemeClr val="accent1"/>
+            </a:fillRef>
+            <a:effectRef idx="0">
+              <a:srgbClr val="FFFFFF"/>
+            </a:effectRef>
+            <a:fontRef idx="minor">
+              <a:schemeClr val="lt1"/>
+            </a:fontRef>
+          </p:style>
+          <p:txBody>
+            <a:bodyPr rtlCol="0" anchor="t" anchorCtr="0"/>
+            <a:p>
+              <a:pPr algn="ctr"/>
+              <a:r>
+                <a:rPr lang="en-US" altLang="zh-CN" sz="1400" b="1">
+                  <a:solidFill>
+                    <a:schemeClr val="tx1"/>
+                  </a:solidFill>
+                </a:rPr>
+                <a:t>uoa_robot_drone</a:t>
+              </a:r>
+              <a:endParaRPr lang="en-US" altLang="zh-CN" sz="1400" b="1">
+                <a:solidFill>
+                  <a:schemeClr val="tx1"/>
+                </a:solidFill>
+              </a:endParaRPr>
+            </a:p>
+          </p:txBody>
+        </p:sp>
+        <p:sp>
+          <p:nvSpPr>
+            <p:cNvPr id="12" name="圆角矩形 11"/>
+            <p:cNvSpPr/>
+            <p:nvPr/>
+          </p:nvSpPr>
+          <p:spPr>
+            <a:xfrm>
+              <a:off x="9215" y="3147"/>
+              <a:ext cx="2435" cy="516"/>
+            </a:xfrm>
+            <a:prstGeom prst="roundRect">
+              <a:avLst/>
+            </a:prstGeom>
+            <a:solidFill>
+              <a:srgbClr val="CBFFCE"/>
+            </a:solidFill>
+            <a:ln>
+              <a:solidFill>
+                <a:srgbClr val="00B050"/>
+              </a:solidFill>
+            </a:ln>
+            <a:scene3d>
+              <a:camera prst="orthographicFront"/>
+              <a:lightRig rig="threePt" dir="t"/>
+            </a:scene3d>
+            <a:sp3d prstMaterial="metal"/>
+          </p:spPr>
+          <p:style>
+            <a:lnRef idx="2">
+              <a:schemeClr val="accent1">
+                <a:lumMod val="75000"/>
+              </a:schemeClr>
+            </a:lnRef>
+            <a:fillRef idx="1">
+              <a:schemeClr val="accent1"/>
+            </a:fillRef>
+            <a:effectRef idx="0">
+              <a:srgbClr val="FFFFFF"/>
+            </a:effectRef>
+            <a:fontRef idx="minor">
+              <a:schemeClr val="lt1"/>
+            </a:fontRef>
+          </p:style>
+          <p:txBody>
+            <a:bodyPr rtlCol="0" anchor="ctr"/>
+            <a:p>
+              <a:pPr algn="ctr"/>
+              <a:r>
+                <a:rPr lang="en-US" altLang="zh-CN" sz="1400">
+                  <a:solidFill>
+                    <a:schemeClr val="tx1"/>
+                  </a:solidFill>
+                </a:rPr>
+                <a:t>Convertor</a:t>
+              </a:r>
+              <a:endParaRPr lang="en-US" altLang="zh-CN" sz="1400">
+                <a:solidFill>
+                  <a:schemeClr val="tx1"/>
+                </a:solidFill>
+              </a:endParaRPr>
+            </a:p>
+          </p:txBody>
+        </p:sp>
+        <p:sp>
+          <p:nvSpPr>
+            <p:cNvPr id="13" name="圆角矩形 12"/>
+            <p:cNvSpPr/>
+            <p:nvPr/>
+          </p:nvSpPr>
+          <p:spPr>
+            <a:xfrm>
+              <a:off x="9216" y="3722"/>
+              <a:ext cx="2435" cy="433"/>
+            </a:xfrm>
+            <a:prstGeom prst="roundRect">
+              <a:avLst/>
+            </a:prstGeom>
+            <a:solidFill>
+              <a:srgbClr val="CBFFCE"/>
+            </a:solidFill>
+            <a:ln>
+              <a:solidFill>
+                <a:srgbClr val="00B050"/>
+              </a:solidFill>
+            </a:ln>
+            <a:scene3d>
+              <a:camera prst="orthographicFront"/>
+              <a:lightRig rig="threePt" dir="t"/>
+            </a:scene3d>
+            <a:sp3d prstMaterial="metal"/>
+          </p:spPr>
+          <p:style>
+            <a:lnRef idx="2">
+              <a:schemeClr val="accent1">
+                <a:lumMod val="75000"/>
+              </a:schemeClr>
+            </a:lnRef>
+            <a:fillRef idx="1">
+              <a:schemeClr val="accent1"/>
+            </a:fillRef>
+            <a:effectRef idx="0">
+              <a:srgbClr val="FFFFFF"/>
+            </a:effectRef>
+            <a:fontRef idx="minor">
+              <a:schemeClr val="lt1"/>
+            </a:fontRef>
+          </p:style>
+          <p:txBody>
+            <a:bodyPr rtlCol="0" anchor="ctr"/>
+            <a:p>
+              <a:pPr algn="ctr"/>
+              <a:r>
+                <a:rPr lang="en-US" altLang="zh-CN" sz="1400">
+                  <a:solidFill>
+                    <a:schemeClr val="tx1"/>
+                  </a:solidFill>
+                </a:rPr>
+                <a:t>Compressor</a:t>
+              </a:r>
+              <a:endParaRPr lang="en-US" altLang="zh-CN" sz="1400">
+                <a:solidFill>
+                  <a:schemeClr val="tx1"/>
+                </a:solidFill>
+              </a:endParaRPr>
+            </a:p>
+          </p:txBody>
+        </p:sp>
+        <p:sp>
+          <p:nvSpPr>
+            <p:cNvPr id="42" name="圆角矩形 41"/>
+            <p:cNvSpPr/>
+            <p:nvPr/>
+          </p:nvSpPr>
+          <p:spPr>
+            <a:xfrm>
+              <a:off x="6211" y="6779"/>
+              <a:ext cx="5607" cy="560"/>
+            </a:xfrm>
+            <a:prstGeom prst="roundRect">
+              <a:avLst/>
+            </a:prstGeom>
+            <a:solidFill>
+              <a:srgbClr val="CBFFCE"/>
+            </a:solidFill>
+            <a:ln>
+              <a:solidFill>
+                <a:srgbClr val="00B050"/>
+              </a:solidFill>
+            </a:ln>
+            <a:scene3d>
+              <a:camera prst="orthographicFront"/>
+              <a:lightRig rig="threePt" dir="t"/>
+            </a:scene3d>
+            <a:sp3d prstMaterial="metal"/>
+          </p:spPr>
+          <p:style>
+            <a:lnRef idx="2">
+              <a:schemeClr val="accent1">
+                <a:lumMod val="75000"/>
+              </a:schemeClr>
+            </a:lnRef>
+            <a:fillRef idx="1">
+              <a:schemeClr val="accent1"/>
+            </a:fillRef>
+            <a:effectRef idx="0">
+              <a:srgbClr val="FFFFFF"/>
+            </a:effectRef>
+            <a:fontRef idx="minor">
+              <a:schemeClr val="lt1"/>
+            </a:fontRef>
+          </p:style>
+          <p:txBody>
+            <a:bodyPr rtlCol="0" anchor="ctr"/>
+            <a:p>
+              <a:pPr algn="ctr"/>
+              <a:r>
+                <a:rPr lang="en-US" altLang="zh-CN" sz="1400">
+                  <a:solidFill>
+                    <a:schemeClr val="tx1"/>
+                  </a:solidFill>
+                  <a:sym typeface="+mn-ea"/>
+                </a:rPr>
+                <a:t>python3-colcon</a:t>
+              </a:r>
+              <a:endParaRPr lang="en-US" altLang="zh-CN" sz="1400">
+                <a:solidFill>
+                  <a:schemeClr val="tx1"/>
+                </a:solidFill>
+                <a:sym typeface="+mn-ea"/>
+              </a:endParaRPr>
+            </a:p>
+          </p:txBody>
+        </p:sp>
+        <p:sp>
+          <p:nvSpPr>
+            <p:cNvPr id="66" name="左右箭头 65"/>
+            <p:cNvSpPr/>
+            <p:nvPr/>
+          </p:nvSpPr>
+          <p:spPr>
+            <a:xfrm>
+              <a:off x="2695" y="9579"/>
+              <a:ext cx="14688" cy="1028"/>
+            </a:xfrm>
+            <a:prstGeom prst="leftRightArrow">
+              <a:avLst/>
+            </a:prstGeom>
+            <a:gradFill>
+              <a:gsLst>
+                <a:gs pos="1000">
+                  <a:schemeClr val="accent1">
+                    <a:lumMod val="5000"/>
+                    <a:lumOff val="95000"/>
+                  </a:schemeClr>
+                </a:gs>
+                <a:gs pos="74000">
+                  <a:schemeClr val="accent1">
+                    <a:lumMod val="45000"/>
+                    <a:lumOff val="55000"/>
+                  </a:schemeClr>
+                </a:gs>
+                <a:gs pos="83000">
+                  <a:schemeClr val="accent1">
+                    <a:lumMod val="45000"/>
+                    <a:lumOff val="55000"/>
+                  </a:schemeClr>
+                </a:gs>
+                <a:gs pos="100000">
+                  <a:schemeClr val="accent1">
+                    <a:lumMod val="30000"/>
+                    <a:lumOff val="70000"/>
+                  </a:schemeClr>
+                </a:gs>
+              </a:gsLst>
+              <a:path path="shape">
+                <a:fillToRect l="50000" t="50000" r="50000" b="50000"/>
+              </a:path>
+              <a:tileRect/>
+            </a:gradFill>
+          </p:spPr>
+          <p:style>
+            <a:lnRef idx="2">
+              <a:schemeClr val="accent1">
+                <a:lumMod val="75000"/>
+              </a:schemeClr>
+            </a:lnRef>
+            <a:fillRef idx="1">
+              <a:schemeClr val="accent1"/>
+            </a:fillRef>
+            <a:effectRef idx="0">
+              <a:srgbClr val="FFFFFF"/>
+            </a:effectRef>
+            <a:fontRef idx="minor">
+              <a:schemeClr val="lt1"/>
+            </a:fontRef>
+          </p:style>
+          <p:txBody>
+            <a:bodyPr rtlCol="0" anchor="ctr"/>
+            <a:p>
+              <a:pPr algn="ctr"/>
+              <a:r>
+                <a:rPr lang="en-US" altLang="zh-CN" b="1">
+                  <a:solidFill>
+                    <a:srgbClr val="7030A0"/>
+                  </a:solidFill>
+                </a:rPr>
+                <a:t>ROS Middleware (RMW) [topics] [services] [actions]</a:t>
+              </a:r>
+              <a:endParaRPr lang="en-US" altLang="zh-CN" b="1">
+                <a:solidFill>
+                  <a:srgbClr val="7030A0"/>
+                </a:solidFill>
+              </a:endParaRPr>
+            </a:p>
+          </p:txBody>
+        </p:sp>
+        <p:sp>
+          <p:nvSpPr>
+            <p:cNvPr id="67" name="圆角矩形 66"/>
+            <p:cNvSpPr/>
+            <p:nvPr/>
+          </p:nvSpPr>
+          <p:spPr>
+            <a:xfrm>
+              <a:off x="1733" y="52"/>
+              <a:ext cx="16611" cy="742"/>
+            </a:xfrm>
+            <a:prstGeom prst="roundRect">
+              <a:avLst/>
+            </a:prstGeom>
+            <a:solidFill>
+              <a:srgbClr val="6761FB"/>
+            </a:solidFill>
+          </p:spPr>
+          <p:style>
+            <a:lnRef idx="2">
+              <a:schemeClr val="accent1">
+                <a:lumMod val="75000"/>
+              </a:schemeClr>
+            </a:lnRef>
+            <a:fillRef idx="1">
+              <a:schemeClr val="accent1"/>
+            </a:fillRef>
+            <a:effectRef idx="0">
+              <a:srgbClr val="FFFFFF"/>
+            </a:effectRef>
+            <a:fontRef idx="minor">
+              <a:schemeClr val="lt1"/>
+            </a:fontRef>
+          </p:style>
+          <p:txBody>
+            <a:bodyPr rtlCol="0" anchor="ctr"/>
+            <a:p>
+              <a:pPr algn="ctr"/>
+              <a:r>
+                <a:rPr lang="en-US" altLang="zh-CN" b="1">
+                  <a:solidFill>
+                    <a:schemeClr val="bg1"/>
+                  </a:solidFill>
+                  <a:sym typeface="+mn-ea"/>
+                </a:rPr>
+                <a:t>Engineering System Architecture</a:t>
+              </a:r>
+              <a:endParaRPr lang="en-US" altLang="zh-CN" b="1">
+                <a:solidFill>
+                  <a:schemeClr val="bg1"/>
+                </a:solidFill>
+                <a:sym typeface="+mn-ea"/>
+              </a:endParaRPr>
+            </a:p>
+          </p:txBody>
+        </p:sp>
+        <p:sp>
+          <p:nvSpPr>
+            <p:cNvPr id="40" name="圆角矩形 39"/>
+            <p:cNvSpPr/>
+            <p:nvPr/>
+          </p:nvSpPr>
+          <p:spPr>
+            <a:xfrm>
+              <a:off x="12175" y="1553"/>
+              <a:ext cx="5969" cy="7788"/>
+            </a:xfrm>
+            <a:prstGeom prst="roundRect">
+              <a:avLst/>
+            </a:prstGeom>
+            <a:solidFill>
+              <a:srgbClr val="E6CCE5"/>
+            </a:solidFill>
+            <a:ln>
+              <a:solidFill>
+                <a:srgbClr val="7030A0"/>
+              </a:solidFill>
+            </a:ln>
+          </p:spPr>
+          <p:style>
+            <a:lnRef idx="2">
+              <a:schemeClr val="accent1">
+                <a:lumMod val="75000"/>
+              </a:schemeClr>
+            </a:lnRef>
+            <a:fillRef idx="1">
+              <a:schemeClr val="accent1"/>
+            </a:fillRef>
+            <a:effectRef idx="0">
+              <a:srgbClr val="FFFFFF"/>
+            </a:effectRef>
+            <a:fontRef idx="minor">
+              <a:schemeClr val="lt1"/>
+            </a:fontRef>
+          </p:style>
+          <p:txBody>
+            <a:bodyPr rtlCol="0" anchor="t" anchorCtr="0"/>
+            <a:p>
+              <a:pPr algn="ctr"/>
+              <a:r>
+                <a:rPr lang="en-US" altLang="zh-CN" b="1">
+                  <a:solidFill>
+                    <a:schemeClr val="tx1"/>
+                  </a:solidFill>
+                </a:rPr>
+                <a:t>Personal Coumputer</a:t>
+              </a:r>
+              <a:endParaRPr lang="en-US" altLang="zh-CN" b="1">
+                <a:solidFill>
+                  <a:schemeClr val="tx1"/>
+                </a:solidFill>
+              </a:endParaRPr>
+            </a:p>
+          </p:txBody>
+        </p:sp>
+        <p:sp>
+          <p:nvSpPr>
+            <p:cNvPr id="20" name="圆角矩形 19"/>
+            <p:cNvSpPr/>
+            <p:nvPr/>
+          </p:nvSpPr>
+          <p:spPr>
+            <a:xfrm>
+              <a:off x="12450" y="8328"/>
+              <a:ext cx="5410" cy="559"/>
+            </a:xfrm>
+            <a:prstGeom prst="roundRect">
+              <a:avLst/>
+            </a:prstGeom>
+            <a:solidFill>
+              <a:srgbClr val="E6CCE5"/>
+            </a:solidFill>
+            <a:ln>
+              <a:solidFill>
+                <a:srgbClr val="7030A0"/>
+              </a:solidFill>
+            </a:ln>
+            <a:scene3d>
+              <a:camera prst="orthographicFront"/>
+              <a:lightRig rig="threePt" dir="t"/>
+            </a:scene3d>
+            <a:sp3d prstMaterial="metal"/>
+          </p:spPr>
+          <p:style>
+            <a:lnRef idx="2">
+              <a:schemeClr val="accent1">
+                <a:lumMod val="75000"/>
+              </a:schemeClr>
+            </a:lnRef>
+            <a:fillRef idx="1">
+              <a:schemeClr val="accent1"/>
+            </a:fillRef>
+            <a:effectRef idx="0">
+              <a:srgbClr val="FFFFFF"/>
+            </a:effectRef>
+            <a:fontRef idx="minor">
+              <a:schemeClr val="lt1"/>
+            </a:fontRef>
+          </p:style>
+          <p:txBody>
+            <a:bodyPr rtlCol="0" anchor="ctr"/>
+            <a:p>
+              <a:pPr algn="ctr"/>
+              <a:r>
+                <a:rPr lang="en-US" altLang="zh-CN" sz="1400">
+                  <a:solidFill>
+                    <a:schemeClr val="tx1"/>
+                  </a:solidFill>
+                </a:rPr>
+                <a:t>Ubuntu Desktop (L4T) 22.04 LTS</a:t>
+              </a:r>
+              <a:endParaRPr lang="en-US" altLang="zh-CN" sz="1400">
+                <a:solidFill>
+                  <a:schemeClr val="tx1"/>
+                </a:solidFill>
+              </a:endParaRPr>
+            </a:p>
+          </p:txBody>
+        </p:sp>
+        <p:sp>
+          <p:nvSpPr>
+            <p:cNvPr id="44" name="圆角矩形 43"/>
+            <p:cNvSpPr/>
+            <p:nvPr/>
+          </p:nvSpPr>
+          <p:spPr>
+            <a:xfrm>
+              <a:off x="12450" y="7649"/>
+              <a:ext cx="5410" cy="560"/>
+            </a:xfrm>
+            <a:prstGeom prst="roundRect">
+              <a:avLst/>
+            </a:prstGeom>
+            <a:solidFill>
+              <a:srgbClr val="E6CCE5"/>
+            </a:solidFill>
+            <a:ln>
+              <a:solidFill>
+                <a:srgbClr val="7030A0"/>
+              </a:solidFill>
+            </a:ln>
+            <a:scene3d>
+              <a:camera prst="orthographicFront"/>
+              <a:lightRig rig="threePt" dir="t"/>
+            </a:scene3d>
+            <a:sp3d prstMaterial="metal"/>
+          </p:spPr>
+          <p:style>
+            <a:lnRef idx="2">
+              <a:schemeClr val="accent1">
+                <a:lumMod val="75000"/>
+              </a:schemeClr>
+            </a:lnRef>
+            <a:fillRef idx="1">
+              <a:schemeClr val="accent1"/>
+            </a:fillRef>
+            <a:effectRef idx="0">
+              <a:srgbClr val="FFFFFF"/>
+            </a:effectRef>
+            <a:fontRef idx="minor">
+              <a:schemeClr val="lt1"/>
+            </a:fontRef>
+          </p:style>
+          <p:txBody>
+            <a:bodyPr rtlCol="0" anchor="ctr"/>
+            <a:p>
+              <a:pPr algn="ctr"/>
+              <a:r>
+                <a:rPr lang="en-US" altLang="zh-CN" sz="1400">
+                  <a:solidFill>
+                    <a:schemeClr val="tx1"/>
+                  </a:solidFill>
+                  <a:sym typeface="+mn-ea"/>
+                </a:rPr>
+                <a:t>ROS2 Humble Hawksbill</a:t>
+              </a:r>
+              <a:endParaRPr lang="en-US" altLang="zh-CN" sz="1400">
+                <a:solidFill>
+                  <a:schemeClr val="tx1"/>
+                </a:solidFill>
+                <a:sym typeface="+mn-ea"/>
+              </a:endParaRPr>
+            </a:p>
+          </p:txBody>
+        </p:sp>
+        <p:sp>
+          <p:nvSpPr>
+            <p:cNvPr id="45" name="圆角矩形 44"/>
+            <p:cNvSpPr/>
+            <p:nvPr/>
+          </p:nvSpPr>
+          <p:spPr>
+            <a:xfrm>
+              <a:off x="12450" y="6903"/>
+              <a:ext cx="5410" cy="560"/>
+            </a:xfrm>
+            <a:prstGeom prst="roundRect">
+              <a:avLst/>
+            </a:prstGeom>
+            <a:solidFill>
+              <a:srgbClr val="E6CCE5"/>
+            </a:solidFill>
+            <a:ln>
+              <a:solidFill>
+                <a:srgbClr val="7030A0"/>
+              </a:solidFill>
+            </a:ln>
+            <a:scene3d>
+              <a:camera prst="orthographicFront"/>
+              <a:lightRig rig="threePt" dir="t"/>
+            </a:scene3d>
+            <a:sp3d prstMaterial="metal"/>
+          </p:spPr>
+          <p:style>
+            <a:lnRef idx="2">
+              <a:schemeClr val="accent1">
+                <a:lumMod val="75000"/>
+              </a:schemeClr>
+            </a:lnRef>
+            <a:fillRef idx="1">
+              <a:schemeClr val="accent1"/>
+            </a:fillRef>
+            <a:effectRef idx="0">
+              <a:srgbClr val="FFFFFF"/>
+            </a:effectRef>
+            <a:fontRef idx="minor">
+              <a:schemeClr val="lt1"/>
+            </a:fontRef>
+          </p:style>
+          <p:txBody>
+            <a:bodyPr rtlCol="0" anchor="ctr"/>
+            <a:p>
+              <a:pPr algn="ctr"/>
+              <a:r>
+                <a:rPr lang="en-US" altLang="zh-CN" sz="1400">
+                  <a:solidFill>
+                    <a:schemeClr val="tx1"/>
+                  </a:solidFill>
+                  <a:sym typeface="+mn-ea"/>
+                </a:rPr>
+                <a:t>python3-colcon</a:t>
+              </a:r>
+              <a:endParaRPr lang="en-US" altLang="zh-CN" sz="1400">
+                <a:solidFill>
+                  <a:schemeClr val="tx1"/>
+                </a:solidFill>
+                <a:sym typeface="+mn-ea"/>
+              </a:endParaRPr>
+            </a:p>
+          </p:txBody>
+        </p:sp>
+        <p:sp>
+          <p:nvSpPr>
+            <p:cNvPr id="47" name="圆角矩形 46"/>
+            <p:cNvSpPr/>
+            <p:nvPr/>
+          </p:nvSpPr>
+          <p:spPr>
+            <a:xfrm>
+              <a:off x="12451" y="3859"/>
+              <a:ext cx="5409" cy="1634"/>
+            </a:xfrm>
+            <a:prstGeom prst="roundRect">
+              <a:avLst/>
+            </a:prstGeom>
+            <a:solidFill>
+              <a:srgbClr val="E6CCE5"/>
+            </a:solidFill>
+            <a:ln>
+              <a:solidFill>
+                <a:srgbClr val="7030A0"/>
+              </a:solidFill>
+            </a:ln>
+            <a:scene3d>
+              <a:camera prst="orthographicFront"/>
+              <a:lightRig rig="threePt" dir="t"/>
+            </a:scene3d>
+            <a:sp3d prstMaterial="metal"/>
+          </p:spPr>
+          <p:style>
+            <a:lnRef idx="2">
+              <a:schemeClr val="accent1">
+                <a:lumMod val="75000"/>
+              </a:schemeClr>
+            </a:lnRef>
+            <a:fillRef idx="1">
+              <a:schemeClr val="accent1"/>
+            </a:fillRef>
+            <a:effectRef idx="0">
+              <a:srgbClr val="FFFFFF"/>
+            </a:effectRef>
+            <a:fontRef idx="minor">
+              <a:schemeClr val="lt1"/>
+            </a:fontRef>
+          </p:style>
+          <p:txBody>
+            <a:bodyPr rtlCol="0" anchor="t" anchorCtr="0"/>
+            <a:p>
+              <a:pPr algn="ctr"/>
+              <a:r>
+                <a:rPr lang="en-US" altLang="zh-CN" sz="1400" b="1">
+                  <a:solidFill>
+                    <a:schemeClr val="tx1"/>
+                  </a:solidFill>
+                </a:rPr>
+                <a:t>uoa_robot_drone</a:t>
+              </a:r>
+              <a:endParaRPr lang="en-US" altLang="zh-CN" sz="1400" b="1">
+                <a:solidFill>
+                  <a:schemeClr val="tx1"/>
+                </a:solidFill>
+              </a:endParaRPr>
+            </a:p>
+          </p:txBody>
+        </p:sp>
+        <p:sp>
+          <p:nvSpPr>
+            <p:cNvPr id="48" name="圆角矩形 47"/>
+            <p:cNvSpPr/>
+            <p:nvPr/>
+          </p:nvSpPr>
+          <p:spPr>
+            <a:xfrm>
+              <a:off x="12607" y="4444"/>
+              <a:ext cx="2480" cy="409"/>
+            </a:xfrm>
+            <a:prstGeom prst="roundRect">
+              <a:avLst/>
+            </a:prstGeom>
+            <a:solidFill>
+              <a:srgbClr val="E6CCE5"/>
+            </a:solidFill>
+            <a:ln>
+              <a:solidFill>
+                <a:srgbClr val="7030A0"/>
+              </a:solidFill>
+            </a:ln>
+            <a:scene3d>
+              <a:camera prst="orthographicFront"/>
+              <a:lightRig rig="threePt" dir="t"/>
+            </a:scene3d>
+            <a:sp3d prstMaterial="metal"/>
+          </p:spPr>
+          <p:style>
+            <a:lnRef idx="2">
+              <a:schemeClr val="accent1">
+                <a:lumMod val="75000"/>
+              </a:schemeClr>
+            </a:lnRef>
+            <a:fillRef idx="1">
+              <a:schemeClr val="accent1"/>
+            </a:fillRef>
+            <a:effectRef idx="0">
+              <a:srgbClr val="FFFFFF"/>
+            </a:effectRef>
+            <a:fontRef idx="minor">
+              <a:schemeClr val="lt1"/>
+            </a:fontRef>
+          </p:style>
+          <p:txBody>
+            <a:bodyPr rtlCol="0" anchor="ctr"/>
+            <a:p>
+              <a:pPr algn="ctr"/>
+              <a:r>
+                <a:rPr lang="en-US" altLang="zh-CN" sz="1400">
+                  <a:solidFill>
+                    <a:schemeClr val="tx1"/>
+                  </a:solidFill>
+                </a:rPr>
+                <a:t>Decompressor</a:t>
+              </a:r>
+              <a:endParaRPr lang="en-US" altLang="zh-CN" sz="1400">
+                <a:solidFill>
+                  <a:schemeClr val="tx1"/>
+                </a:solidFill>
+              </a:endParaRPr>
+            </a:p>
+          </p:txBody>
+        </p:sp>
+        <p:sp>
+          <p:nvSpPr>
+            <p:cNvPr id="49" name="圆角矩形 48"/>
+            <p:cNvSpPr/>
+            <p:nvPr/>
+          </p:nvSpPr>
+          <p:spPr>
+            <a:xfrm>
+              <a:off x="12608" y="4960"/>
+              <a:ext cx="2481" cy="420"/>
+            </a:xfrm>
+            <a:prstGeom prst="roundRect">
+              <a:avLst/>
+            </a:prstGeom>
+            <a:solidFill>
+              <a:srgbClr val="E6CCE5"/>
+            </a:solidFill>
+            <a:ln>
+              <a:solidFill>
+                <a:srgbClr val="7030A0"/>
+              </a:solidFill>
+            </a:ln>
+            <a:scene3d>
+              <a:camera prst="orthographicFront"/>
+              <a:lightRig rig="threePt" dir="t"/>
+            </a:scene3d>
+            <a:sp3d prstMaterial="metal"/>
+          </p:spPr>
+          <p:style>
+            <a:lnRef idx="2">
+              <a:schemeClr val="accent1">
+                <a:lumMod val="75000"/>
+              </a:schemeClr>
+            </a:lnRef>
+            <a:fillRef idx="1">
+              <a:schemeClr val="accent1"/>
+            </a:fillRef>
+            <a:effectRef idx="0">
+              <a:srgbClr val="FFFFFF"/>
+            </a:effectRef>
+            <a:fontRef idx="minor">
+              <a:schemeClr val="lt1"/>
+            </a:fontRef>
+          </p:style>
+          <p:txBody>
+            <a:bodyPr rtlCol="0" anchor="ctr"/>
+            <a:p>
+              <a:pPr algn="ctr"/>
+              <a:r>
+                <a:rPr lang="en-US" altLang="zh-CN" sz="1400">
+                  <a:solidFill>
+                    <a:schemeClr val="tx1"/>
+                  </a:solidFill>
+                </a:rPr>
+                <a:t>Position Listener</a:t>
+              </a:r>
+              <a:endParaRPr lang="en-US" altLang="zh-CN" sz="1400">
+                <a:solidFill>
+                  <a:schemeClr val="tx1"/>
+                </a:solidFill>
+              </a:endParaRPr>
+            </a:p>
+          </p:txBody>
+        </p:sp>
+        <p:sp>
+          <p:nvSpPr>
+            <p:cNvPr id="50" name="圆角矩形 49"/>
+            <p:cNvSpPr/>
+            <p:nvPr/>
+          </p:nvSpPr>
+          <p:spPr>
+            <a:xfrm>
+              <a:off x="15228" y="4422"/>
+              <a:ext cx="2480" cy="413"/>
+            </a:xfrm>
+            <a:prstGeom prst="roundRect">
+              <a:avLst/>
+            </a:prstGeom>
+            <a:solidFill>
+              <a:srgbClr val="E6CCE5"/>
+            </a:solidFill>
+            <a:ln>
+              <a:solidFill>
+                <a:srgbClr val="7030A0"/>
+              </a:solidFill>
+            </a:ln>
+            <a:scene3d>
+              <a:camera prst="orthographicFront"/>
+              <a:lightRig rig="threePt" dir="t"/>
+            </a:scene3d>
+            <a:sp3d prstMaterial="metal"/>
+          </p:spPr>
+          <p:style>
+            <a:lnRef idx="2">
+              <a:schemeClr val="accent1">
+                <a:lumMod val="75000"/>
+              </a:schemeClr>
+            </a:lnRef>
+            <a:fillRef idx="1">
+              <a:schemeClr val="accent1"/>
+            </a:fillRef>
+            <a:effectRef idx="0">
+              <a:srgbClr val="FFFFFF"/>
+            </a:effectRef>
+            <a:fontRef idx="minor">
+              <a:schemeClr val="lt1"/>
+            </a:fontRef>
+          </p:style>
+          <p:txBody>
+            <a:bodyPr rtlCol="0" anchor="ctr"/>
+            <a:p>
+              <a:pPr algn="ctr"/>
+              <a:r>
+                <a:rPr lang="en-US" altLang="zh-CN" sz="1400">
+                  <a:solidFill>
+                    <a:schemeClr val="tx1"/>
+                  </a:solidFill>
+                </a:rPr>
+                <a:t>Auto Delivery</a:t>
+              </a:r>
+              <a:endParaRPr lang="en-US" altLang="zh-CN" sz="1400">
+                <a:solidFill>
+                  <a:schemeClr val="tx1"/>
+                </a:solidFill>
+              </a:endParaRPr>
+            </a:p>
+          </p:txBody>
+        </p:sp>
+        <p:sp>
+          <p:nvSpPr>
+            <p:cNvPr id="51" name="圆角矩形 50"/>
+            <p:cNvSpPr/>
+            <p:nvPr/>
+          </p:nvSpPr>
+          <p:spPr>
+            <a:xfrm>
+              <a:off x="15229" y="4955"/>
+              <a:ext cx="2480" cy="424"/>
+            </a:xfrm>
+            <a:prstGeom prst="roundRect">
+              <a:avLst/>
+            </a:prstGeom>
+            <a:solidFill>
+              <a:srgbClr val="E6CCE5"/>
+            </a:solidFill>
+            <a:ln>
+              <a:solidFill>
+                <a:srgbClr val="7030A0"/>
+              </a:solidFill>
+            </a:ln>
+            <a:scene3d>
+              <a:camera prst="orthographicFront"/>
+              <a:lightRig rig="threePt" dir="t"/>
+            </a:scene3d>
+            <a:sp3d prstMaterial="metal"/>
+          </p:spPr>
+          <p:style>
+            <a:lnRef idx="2">
+              <a:schemeClr val="accent1">
+                <a:lumMod val="75000"/>
+              </a:schemeClr>
+            </a:lnRef>
+            <a:fillRef idx="1">
+              <a:schemeClr val="accent1"/>
+            </a:fillRef>
+            <a:effectRef idx="0">
+              <a:srgbClr val="FFFFFF"/>
+            </a:effectRef>
+            <a:fontRef idx="minor">
+              <a:schemeClr val="lt1"/>
+            </a:fontRef>
+          </p:style>
+          <p:txBody>
+            <a:bodyPr rtlCol="0" anchor="ctr"/>
+            <a:p>
+              <a:pPr algn="ctr"/>
+              <a:r>
+                <a:rPr lang="en-US" altLang="zh-CN" sz="1400">
+                  <a:solidFill>
+                    <a:schemeClr val="tx1"/>
+                  </a:solidFill>
+                </a:rPr>
+                <a:t>Voice Control</a:t>
+              </a:r>
+              <a:endParaRPr lang="en-US" altLang="zh-CN" sz="1400">
+                <a:solidFill>
+                  <a:schemeClr val="tx1"/>
+                </a:solidFill>
+              </a:endParaRPr>
+            </a:p>
+          </p:txBody>
+        </p:sp>
+        <p:sp>
+          <p:nvSpPr>
+            <p:cNvPr id="53" name="圆角矩形 52"/>
+            <p:cNvSpPr/>
+            <p:nvPr/>
+          </p:nvSpPr>
+          <p:spPr>
+            <a:xfrm>
+              <a:off x="12451" y="6256"/>
+              <a:ext cx="2636" cy="560"/>
+            </a:xfrm>
+            <a:prstGeom prst="roundRect">
+              <a:avLst/>
+            </a:prstGeom>
+            <a:solidFill>
+              <a:srgbClr val="E6CCE5"/>
+            </a:solidFill>
+            <a:ln>
+              <a:solidFill>
+                <a:srgbClr val="7030A0"/>
+              </a:solidFill>
+            </a:ln>
+            <a:scene3d>
+              <a:camera prst="orthographicFront"/>
+              <a:lightRig rig="threePt" dir="t"/>
+            </a:scene3d>
+            <a:sp3d prstMaterial="metal"/>
+          </p:spPr>
+          <p:style>
+            <a:lnRef idx="2">
+              <a:schemeClr val="accent1">
+                <a:lumMod val="75000"/>
+              </a:schemeClr>
+            </a:lnRef>
+            <a:fillRef idx="1">
+              <a:schemeClr val="accent1"/>
+            </a:fillRef>
+            <a:effectRef idx="0">
+              <a:srgbClr val="FFFFFF"/>
+            </a:effectRef>
+            <a:fontRef idx="minor">
+              <a:schemeClr val="lt1"/>
+            </a:fontRef>
+          </p:style>
+          <p:txBody>
+            <a:bodyPr rtlCol="0" anchor="ctr"/>
+            <a:p>
+              <a:pPr algn="ctr"/>
+              <a:r>
+                <a:rPr lang="en-US" altLang="zh-CN" sz="1400">
+                  <a:solidFill>
+                    <a:schemeClr val="tx1"/>
+                  </a:solidFill>
+                  <a:sym typeface="+mn-ea"/>
+                </a:rPr>
+                <a:t>Navigation2</a:t>
+              </a:r>
+              <a:endParaRPr lang="en-US" altLang="zh-CN" sz="1400">
+                <a:solidFill>
+                  <a:schemeClr val="tx1"/>
+                </a:solidFill>
+                <a:sym typeface="+mn-ea"/>
+              </a:endParaRPr>
+            </a:p>
+          </p:txBody>
+        </p:sp>
+        <p:sp>
+          <p:nvSpPr>
+            <p:cNvPr id="55" name="圆角矩形 54"/>
+            <p:cNvSpPr/>
+            <p:nvPr/>
+          </p:nvSpPr>
+          <p:spPr>
+            <a:xfrm>
+              <a:off x="12450" y="5593"/>
+              <a:ext cx="5410" cy="560"/>
+            </a:xfrm>
+            <a:prstGeom prst="roundRect">
+              <a:avLst/>
+            </a:prstGeom>
+            <a:solidFill>
+              <a:srgbClr val="E6CCE5"/>
+            </a:solidFill>
+            <a:ln>
+              <a:solidFill>
+                <a:srgbClr val="7030A0"/>
+              </a:solidFill>
+            </a:ln>
+            <a:scene3d>
+              <a:camera prst="orthographicFront"/>
+              <a:lightRig rig="threePt" dir="t"/>
+            </a:scene3d>
+            <a:sp3d prstMaterial="metal"/>
+          </p:spPr>
+          <p:style>
+            <a:lnRef idx="2">
+              <a:schemeClr val="accent1">
+                <a:lumMod val="75000"/>
+              </a:schemeClr>
+            </a:lnRef>
+            <a:fillRef idx="1">
+              <a:schemeClr val="accent1"/>
+            </a:fillRef>
+            <a:effectRef idx="0">
+              <a:srgbClr val="FFFFFF"/>
+            </a:effectRef>
+            <a:fontRef idx="minor">
+              <a:schemeClr val="lt1"/>
+            </a:fontRef>
+          </p:style>
+          <p:txBody>
+            <a:bodyPr rtlCol="0" anchor="ctr"/>
+            <a:p>
+              <a:pPr algn="ctr"/>
+              <a:r>
+                <a:rPr lang="en-US" altLang="zh-CN" sz="1400">
+                  <a:solidFill>
+                    <a:schemeClr val="tx1"/>
+                  </a:solidFill>
+                  <a:sym typeface="+mn-ea"/>
+                </a:rPr>
+                <a:t>DJITelloPy</a:t>
+              </a:r>
+              <a:endParaRPr lang="en-US" altLang="zh-CN" sz="1400">
+                <a:solidFill>
+                  <a:schemeClr val="tx1"/>
+                </a:solidFill>
+                <a:sym typeface="+mn-ea"/>
+              </a:endParaRPr>
+            </a:p>
+          </p:txBody>
+        </p:sp>
+        <p:sp>
+          <p:nvSpPr>
+            <p:cNvPr id="57" name="圆角矩形 56"/>
+            <p:cNvSpPr/>
+            <p:nvPr/>
+          </p:nvSpPr>
+          <p:spPr>
+            <a:xfrm>
+              <a:off x="12451" y="2475"/>
+              <a:ext cx="5409" cy="1250"/>
+            </a:xfrm>
+            <a:prstGeom prst="roundRect">
+              <a:avLst/>
+            </a:prstGeom>
+            <a:solidFill>
+              <a:srgbClr val="E6CCE5"/>
+            </a:solidFill>
+            <a:ln>
+              <a:solidFill>
+                <a:srgbClr val="7030A0"/>
+              </a:solidFill>
+            </a:ln>
+            <a:scene3d>
+              <a:camera prst="orthographicFront"/>
+              <a:lightRig rig="threePt" dir="t"/>
+            </a:scene3d>
+            <a:sp3d prstMaterial="metal"/>
+          </p:spPr>
+          <p:style>
+            <a:lnRef idx="2">
+              <a:schemeClr val="accent1">
+                <a:lumMod val="75000"/>
+              </a:schemeClr>
+            </a:lnRef>
+            <a:fillRef idx="1">
+              <a:schemeClr val="accent1"/>
+            </a:fillRef>
+            <a:effectRef idx="0">
+              <a:srgbClr val="FFFFFF"/>
+            </a:effectRef>
+            <a:fontRef idx="minor">
+              <a:schemeClr val="lt1"/>
+            </a:fontRef>
+          </p:style>
+          <p:txBody>
+            <a:bodyPr rtlCol="0" anchor="t" anchorCtr="0"/>
+            <a:p>
+              <a:pPr algn="ctr"/>
+              <a:r>
+                <a:rPr lang="en-US" altLang="zh-CN" sz="1400" b="1">
+                  <a:solidFill>
+                    <a:schemeClr val="tx1"/>
+                  </a:solidFill>
+                </a:rPr>
+                <a:t>Display Monitor</a:t>
+              </a:r>
+              <a:endParaRPr lang="en-US" altLang="zh-CN" sz="1400" b="1">
+                <a:solidFill>
+                  <a:schemeClr val="tx1"/>
+                </a:solidFill>
+              </a:endParaRPr>
+            </a:p>
+          </p:txBody>
+        </p:sp>
+        <p:sp>
+          <p:nvSpPr>
+            <p:cNvPr id="58" name="圆角矩形 57"/>
+            <p:cNvSpPr/>
+            <p:nvPr/>
+          </p:nvSpPr>
+          <p:spPr>
+            <a:xfrm>
+              <a:off x="12606" y="3114"/>
+              <a:ext cx="2480" cy="549"/>
+            </a:xfrm>
+            <a:prstGeom prst="roundRect">
+              <a:avLst/>
+            </a:prstGeom>
+            <a:solidFill>
+              <a:srgbClr val="E6CCE5"/>
+            </a:solidFill>
+            <a:ln>
+              <a:solidFill>
+                <a:srgbClr val="7030A0"/>
+              </a:solidFill>
+            </a:ln>
+            <a:scene3d>
+              <a:camera prst="orthographicFront"/>
+              <a:lightRig rig="threePt" dir="t"/>
+            </a:scene3d>
+            <a:sp3d prstMaterial="metal"/>
+          </p:spPr>
+          <p:style>
+            <a:lnRef idx="2">
+              <a:schemeClr val="accent1">
+                <a:lumMod val="75000"/>
+              </a:schemeClr>
+            </a:lnRef>
+            <a:fillRef idx="1">
+              <a:schemeClr val="accent1"/>
+            </a:fillRef>
+            <a:effectRef idx="0">
+              <a:srgbClr val="FFFFFF"/>
+            </a:effectRef>
+            <a:fontRef idx="minor">
+              <a:schemeClr val="lt1"/>
+            </a:fontRef>
+          </p:style>
+          <p:txBody>
+            <a:bodyPr rtlCol="0" anchor="ctr"/>
+            <a:p>
+              <a:pPr algn="ctr"/>
+              <a:r>
+                <a:rPr lang="en-US" altLang="zh-CN" sz="1400">
+                  <a:solidFill>
+                    <a:schemeClr val="tx1"/>
+                  </a:solidFill>
+                </a:rPr>
+                <a:t>Rviz2</a:t>
+              </a:r>
+              <a:endParaRPr lang="en-US" altLang="zh-CN" sz="1400">
+                <a:solidFill>
+                  <a:schemeClr val="tx1"/>
+                </a:solidFill>
+              </a:endParaRPr>
+            </a:p>
+          </p:txBody>
+        </p:sp>
+        <p:sp>
+          <p:nvSpPr>
+            <p:cNvPr id="60" name="圆角矩形 59"/>
+            <p:cNvSpPr/>
+            <p:nvPr/>
+          </p:nvSpPr>
+          <p:spPr>
+            <a:xfrm>
+              <a:off x="15230" y="3113"/>
+              <a:ext cx="2480" cy="548"/>
+            </a:xfrm>
+            <a:prstGeom prst="roundRect">
+              <a:avLst/>
+            </a:prstGeom>
+            <a:solidFill>
+              <a:srgbClr val="E6CCE5"/>
+            </a:solidFill>
+            <a:ln>
+              <a:solidFill>
+                <a:srgbClr val="7030A0"/>
+              </a:solidFill>
+            </a:ln>
+            <a:scene3d>
+              <a:camera prst="orthographicFront"/>
+              <a:lightRig rig="threePt" dir="t"/>
+            </a:scene3d>
+            <a:sp3d prstMaterial="metal"/>
+          </p:spPr>
+          <p:style>
+            <a:lnRef idx="2">
+              <a:schemeClr val="accent1">
+                <a:lumMod val="75000"/>
+              </a:schemeClr>
+            </a:lnRef>
+            <a:fillRef idx="1">
+              <a:schemeClr val="accent1"/>
+            </a:fillRef>
+            <a:effectRef idx="0">
+              <a:srgbClr val="FFFFFF"/>
+            </a:effectRef>
+            <a:fontRef idx="minor">
+              <a:schemeClr val="lt1"/>
+            </a:fontRef>
+          </p:style>
+          <p:txBody>
+            <a:bodyPr rtlCol="0" anchor="ctr"/>
+            <a:p>
+              <a:pPr algn="ctr"/>
+              <a:r>
+                <a:rPr lang="en-US" altLang="zh-CN" sz="1400">
+                  <a:solidFill>
+                    <a:schemeClr val="tx1"/>
+                  </a:solidFill>
+                </a:rPr>
+                <a:t>rtabmap_viz</a:t>
+              </a:r>
+              <a:endParaRPr lang="en-US" altLang="zh-CN" sz="1400">
+                <a:solidFill>
+                  <a:schemeClr val="tx1"/>
+                </a:solidFill>
+              </a:endParaRPr>
+            </a:p>
+          </p:txBody>
+        </p:sp>
+        <p:sp>
+          <p:nvSpPr>
+            <p:cNvPr id="68" name="圆角矩形 67"/>
+            <p:cNvSpPr/>
+            <p:nvPr/>
+          </p:nvSpPr>
+          <p:spPr>
+            <a:xfrm>
+              <a:off x="15230" y="6256"/>
+              <a:ext cx="2630" cy="560"/>
+            </a:xfrm>
+            <a:prstGeom prst="roundRect">
+              <a:avLst/>
+            </a:prstGeom>
+            <a:solidFill>
+              <a:srgbClr val="E6CCE5"/>
+            </a:solidFill>
+            <a:ln>
+              <a:solidFill>
+                <a:srgbClr val="7030A0"/>
+              </a:solidFill>
+            </a:ln>
+            <a:scene3d>
+              <a:camera prst="orthographicFront"/>
+              <a:lightRig rig="threePt" dir="t"/>
+            </a:scene3d>
+            <a:sp3d prstMaterial="metal"/>
+          </p:spPr>
+          <p:style>
+            <a:lnRef idx="2">
+              <a:schemeClr val="accent1">
+                <a:lumMod val="75000"/>
+              </a:schemeClr>
+            </a:lnRef>
+            <a:fillRef idx="1">
+              <a:schemeClr val="accent1"/>
+            </a:fillRef>
+            <a:effectRef idx="0">
+              <a:srgbClr val="FFFFFF"/>
+            </a:effectRef>
+            <a:fontRef idx="minor">
+              <a:schemeClr val="lt1"/>
+            </a:fontRef>
+          </p:style>
+          <p:txBody>
+            <a:bodyPr rtlCol="0" anchor="ctr"/>
+            <a:p>
+              <a:pPr algn="ctr"/>
+              <a:r>
+                <a:rPr lang="en-US" altLang="zh-CN" sz="1400">
+                  <a:solidFill>
+                    <a:schemeClr val="tx1"/>
+                  </a:solidFill>
+                  <a:sym typeface="+mn-ea"/>
+                </a:rPr>
+                <a:t>teleop_keyboard</a:t>
+              </a:r>
+              <a:endParaRPr lang="en-US" altLang="zh-CN" sz="1400">
+                <a:solidFill>
+                  <a:schemeClr val="tx1"/>
+                </a:solidFill>
+                <a:sym typeface="+mn-ea"/>
+              </a:endParaRPr>
+            </a:p>
+          </p:txBody>
+        </p:sp>
+      </p:grpSp>
     </p:spTree>
   </p:cSld>
   <p:clrMapOvr>
